--- a/proposal/PulseCommerce-Presentation-NaturesJoy.pptx
+++ b/proposal/PulseCommerce-Presentation-NaturesJoy.pptx
@@ -43,6 +43,11 @@
     <p:sldId id="291" r:id="rId43"/>
     <p:sldId id="292" r:id="rId44"/>
     <p:sldId id="293" r:id="rId45"/>
+    <p:sldId id="294" r:id="rId46"/>
+    <p:sldId id="295" r:id="rId47"/>
+    <p:sldId id="296" r:id="rId48"/>
+    <p:sldId id="297" r:id="rId49"/>
+    <p:sldId id="298" r:id="rId50"/>
   </p:sldIdLst>
   <p:sldSz cx="12191695" cy="6858000" type="screen4x3"/>
   <p:notesSz cx="6858000" cy="9144000"/>
@@ -559,12 +564,12 @@
           </a:p>
           <a:p>
             <a:r>
-              <a:t>₹20,000</a:t>
-            </a:r>
-          </a:p>
-          <a:p>
-            <a:r>
-              <a:t>One-time build</a:t>
+              <a:t>₹25,000</a:t>
+            </a:r>
+          </a:p>
+          <a:p>
+            <a:r>
+              <a:t>One-time, from</a:t>
             </a:r>
           </a:p>
           <a:p>
@@ -4004,152 +4009,17 @@
           <a:lstStyle/>
           <a:p>
             <a:r>
-              <a:t>Cost comparison</a:t>
-            </a:r>
-          </a:p>
-          <a:p>
-            <a:r>
-              <a:t>Two ways to send WhatsApp</a:t>
-            </a:r>
-          </a:p>
-          <a:p>
-            <a:r>
-              <a:t>Official WhatsApp Cloud API</a:t>
-            </a:r>
-          </a:p>
-          <a:p>
-            <a:r>
-              <a:t>PulseCommerce, self-hosted</a:t>
-            </a:r>
-          </a:p>
-          <a:p>
-            <a:r>
-              <a:t>Cost per message</a:t>
-            </a:r>
-          </a:p>
-          <a:p>
-            <a:r>
-              <a:t>Billed per conversation, in INR</a:t>
-            </a:r>
-          </a:p>
-          <a:p>
-            <a:r>
-              <a:t>Zero</a:t>
-            </a:r>
-          </a:p>
-          <a:p>
-            <a:r>
-              <a:t>Marketing messages</a:t>
-            </a:r>
-          </a:p>
-          <a:p>
-            <a:r>
-              <a:t>Charged at the marketing rate</a:t>
-            </a:r>
-          </a:p>
-          <a:p>
-            <a:r>
-              <a:t>No charge</a:t>
-            </a:r>
-          </a:p>
-          <a:p>
-            <a:r>
-              <a:t>Message templates</a:t>
-            </a:r>
-          </a:p>
-          <a:p>
-            <a:r>
-              <a:t>Pre-approval required by Meta</a:t>
-            </a:r>
-          </a:p>
-          <a:p>
-            <a:r>
-              <a:t>Write and send immediately</a:t>
-            </a:r>
-          </a:p>
-          <a:p>
-            <a:r>
-              <a:t>Setup</a:t>
-            </a:r>
-          </a:p>
-          <a:p>
-            <a:r>
-              <a:t>Meta Business verification</a:t>
-            </a:r>
-          </a:p>
-          <a:p>
-            <a:r>
-              <a:t>Scan a QR code</a:t>
-            </a:r>
-          </a:p>
-          <a:p>
-            <a:r>
-              <a:t>Running cost</a:t>
-            </a:r>
-          </a:p>
-          <a:p>
-            <a:r>
-              <a:t>Per conversation, forever</a:t>
-            </a:r>
-          </a:p>
-          <a:p>
-            <a:r>
-              <a:t>A small server, roughly ₹500/month</a:t>
-            </a:r>
-          </a:p>
-          <a:p>
-            <a:r>
-              <a:t>Tappable buttons</a:t>
-            </a:r>
-          </a:p>
-          <a:p>
-            <a:r>
-              <a:t>Yes</a:t>
-            </a:r>
-          </a:p>
-          <a:p>
-            <a:r>
-              <a:t>No — link previews instead</a:t>
-            </a:r>
-          </a:p>
-          <a:p>
-            <a:r>
-              <a:t>Delivery guarantee</a:t>
-            </a:r>
-          </a:p>
-          <a:p>
-            <a:r>
-              <a:t>Official, guaranteed</a:t>
-            </a:r>
-          </a:p>
-          <a:p>
-            <a:r>
-              <a:t>Unofficial; use a dedicated number</a:t>
-            </a:r>
-          </a:p>
-          <a:p>
-            <a:r>
-              <a:t>Meta's per-conversation rates change by country and category and should be</a:t>
-            </a:r>
-          </a:p>
-          <a:p>
-            <a:r>
-              <a:t>confirmed against their current published pricing before you commit. The</a:t>
-            </a:r>
-          </a:p>
-          <a:p>
-            <a:r>
-              <a:t>structural difference does not change: one bills per message, the other does</a:t>
-            </a:r>
-          </a:p>
-          <a:p>
-            <a:r>
-              <a:t>not.</a:t>
-            </a:r>
-          </a:p>
-          <a:p>
-            <a:r>
-              <a:t>* · Meta's per-conversation rates vary by country and message category and change over time; confirm against their current published pricing. ** · Hosting is an estimate, billed by your provider, not by Setups Works.</a:t>
+              <a:t>Why PulseCommerce</a:t>
+            </a:r>
+          </a:p>
+          <a:p>
+            <a:r>
+              <a:t>What the tools you already have cannot do</a:t>
+            </a:r>
+          </a:p>
+          <a:p>
+            <a:r>
+              <a:t>Capability</a:t>
             </a:r>
           </a:p>
           <a:p>
@@ -4159,7 +4029,87 @@
           </a:p>
           <a:p>
             <a:r>
-              <a:t>Cost</a:t>
+              <a:t>WooCommerce Analytics</a:t>
+            </a:r>
+          </a:p>
+          <a:p>
+            <a:r>
+              <a:t>Google Analytics</a:t>
+            </a:r>
+          </a:p>
+          <a:p>
+            <a:r>
+              <a:t>Customer segmentation</a:t>
+            </a:r>
+          </a:p>
+          <a:p>
+            <a:r>
+              <a:t>✓</a:t>
+            </a:r>
+          </a:p>
+          <a:p>
+            <a:r>
+              <a:t>✕</a:t>
+            </a:r>
+          </a:p>
+          <a:p>
+            <a:r>
+              <a:t>RFM analysis</a:t>
+            </a:r>
+          </a:p>
+          <a:p>
+            <a:r>
+              <a:t>Customer lifetime value</a:t>
+            </a:r>
+          </a:p>
+          <a:p>
+            <a:r>
+              <a:t>Churn prediction</a:t>
+            </a:r>
+          </a:p>
+          <a:p>
+            <a:r>
+              <a:t>Inventory analytics</a:t>
+            </a:r>
+          </a:p>
+          <a:p>
+            <a:r>
+              <a:t>Basic</a:t>
+            </a:r>
+          </a:p>
+          <a:p>
+            <a:r>
+              <a:t>WhatsApp campaigns</a:t>
+            </a:r>
+          </a:p>
+          <a:p>
+            <a:r>
+              <a:t>Customer profiles</a:t>
+            </a:r>
+          </a:p>
+          <a:p>
+            <a:r>
+              <a:t>Forecasting</a:t>
+            </a:r>
+          </a:p>
+          <a:p>
+            <a:r>
+              <a:t>Self-hosted option</a:t>
+            </a:r>
+          </a:p>
+          <a:p>
+            <a:r>
+              <a:t>One-time purchase</a:t>
+            </a:r>
+          </a:p>
+          <a:p>
+            <a:r>
+              <a:t>* Based on the standard published feature sets of each product at the time of writing. Third-party offerings change; verify before relying on any comparison.</a:t>
+            </a:r>
+          </a:p>
+          <a:p>
+            <a:r>
+              <a:t>Comparison</a:t>
             </a:r>
           </a:p>
         </p:txBody>
@@ -4419,42 +4369,17 @@
           <a:lstStyle/>
           <a:p>
             <a:r>
-              <a:t>Cost at your scale</a:t>
-            </a:r>
-          </a:p>
-          <a:p>
-            <a:r>
-              <a:t>One campaign to your customer base</a:t>
-            </a:r>
-          </a:p>
-          <a:p>
-            <a:r>
-              <a:t>11,224 customers. Because the exact Meta rate varies, here is the cost across</a:t>
-            </a:r>
-          </a:p>
-          <a:p>
-            <a:r>
-              <a:t>the plausible range — and what it becomes at one campaign a month.</a:t>
-            </a:r>
-          </a:p>
-          <a:p>
-            <a:r>
-              <a:t>If a marketing conversation costs</a:t>
-            </a:r>
-          </a:p>
-          <a:p>
-            <a:r>
-              <a:t>*</a:t>
-            </a:r>
-          </a:p>
-          <a:p>
-            <a:r>
-              <a:t>One campaign</a:t>
-            </a:r>
-          </a:p>
-          <a:p>
-            <a:r>
-              <a:t>Monthly, for a year</a:t>
+              <a:t>Why PulseCommerce</a:t>
+            </a:r>
+          </a:p>
+          <a:p>
+            <a:r>
+              <a:t>Against the WhatsApp platforms</a:t>
+            </a:r>
+          </a:p>
+          <a:p>
+            <a:r>
+              <a:t>Capability</a:t>
             </a:r>
           </a:p>
           <a:p>
@@ -4464,77 +4389,102 @@
           </a:p>
           <a:p>
             <a:r>
-              <a:t>₹0.50</a:t>
-            </a:r>
-          </a:p>
-          <a:p>
-            <a:r>
-              <a:t>₹5,643</a:t>
-            </a:r>
-          </a:p>
-          <a:p>
-            <a:r>
-              <a:t>₹67,716</a:t>
-            </a:r>
-          </a:p>
-          <a:p>
-            <a:r>
-              <a:t>₹0</a:t>
-            </a:r>
-          </a:p>
-          <a:p>
-            <a:r>
-              <a:t>₹0.75</a:t>
-            </a:r>
-          </a:p>
-          <a:p>
-            <a:r>
-              <a:t>₹8,465</a:t>
-            </a:r>
-          </a:p>
-          <a:p>
-            <a:r>
-              <a:t>₹1,01,574</a:t>
-            </a:r>
-          </a:p>
-          <a:p>
-            <a:r>
-              <a:t>₹1.00</a:t>
-            </a:r>
-          </a:p>
-          <a:p>
-            <a:r>
-              <a:t>₹11,224</a:t>
-            </a:r>
-          </a:p>
-          <a:p>
-            <a:r>
-              <a:t>₹1,35,432</a:t>
-            </a:r>
-          </a:p>
-          <a:p>
-            <a:r>
-              <a:t>2 campaigns</a:t>
-            </a:r>
-          </a:p>
-          <a:p>
-            <a:r>
-              <a:t>Break-even against the ₹20,000 build, at the middle rate</a:t>
-            </a:r>
-          </a:p>
-          <a:p>
-            <a:r>
-              <a:t>₹81,574</a:t>
-            </a:r>
-          </a:p>
-          <a:p>
-            <a:r>
-              <a:t>Saved in year one at one campaign a month, after paying for the build</a:t>
-            </a:r>
-          </a:p>
-          <a:p>
-            <a:r>
-              <a:t>11</a:t>
+              <a:t>AiSensy</a:t>
+            </a:r>
+          </a:p>
+          <a:p>
+            <a:r>
+              <a:t>WATI</a:t>
+            </a:r>
+          </a:p>
+          <a:p>
+            <a:r>
+              <a:t>WooCommerce Reports</a:t>
+            </a:r>
+          </a:p>
+          <a:p>
+            <a:r>
+              <a:t>Customer analytics</a:t>
+            </a:r>
+          </a:p>
+          <a:p>
+            <a:r>
+              <a:t>✓</a:t>
+            </a:r>
+          </a:p>
+          <a:p>
+            <a:r>
+              <a:t>✕</a:t>
+            </a:r>
+          </a:p>
+          <a:p>
+            <a:r>
+              <a:t>Basic</a:t>
+            </a:r>
+          </a:p>
+          <a:p>
+            <a:r>
+              <a:t>RFM segmentation</a:t>
+            </a:r>
+          </a:p>
+          <a:p>
+            <a:r>
+              <a:t>Churn prediction</a:t>
+            </a:r>
+          </a:p>
+          <a:p>
+            <a:r>
+              <a:t>Inventory analytics</a:t>
+            </a:r>
+          </a:p>
+          <a:p>
+            <a:r>
+              <a:t>WhatsApp campaigns</a:t>
+            </a:r>
+          </a:p>
+          <a:p>
+            <a:r>
+              <a:t>Shared inbox</a:t>
+            </a:r>
+          </a:p>
+          <a:p>
+            <a:r>
+              <a:t>Forecasting</a:t>
+            </a:r>
+          </a:p>
+          <a:p>
+            <a:r>
+              <a:t>Customer lifetime value</a:t>
+            </a:r>
+          </a:p>
+          <a:p>
+            <a:r>
+              <a:t>Self-hosted option</a:t>
+            </a:r>
+          </a:p>
+          <a:p>
+            <a:r>
+              <a:t>The messaging platforms send well and know nothing about your customers.</a:t>
+            </a:r>
+          </a:p>
+          <a:p>
+            <a:r>
+              <a:t>The analytics tools know your customers and cannot message them. This does</a:t>
+            </a:r>
+          </a:p>
+          <a:p>
+            <a:r>
+              <a:t>both, which is the whole point — an audience defined by churn risk can be</a:t>
+            </a:r>
+          </a:p>
+          <a:p>
+            <a:r>
+              <a:t>messaged without ever leaving the screen.</a:t>
+            </a:r>
+          </a:p>
+          <a:p>
+            <a:r>
+              <a:t>Comparison</a:t>
             </a:r>
           </a:p>
         </p:txBody>
@@ -4604,97 +4554,117 @@
           <a:lstStyle/>
           <a:p>
             <a:r>
-              <a:t>Engineering</a:t>
-            </a:r>
-          </a:p>
-          <a:p>
-            <a:r>
-              <a:t>Built for a store your size</a:t>
-            </a:r>
-          </a:p>
-          <a:p>
-            <a:r>
-              <a:t>Measured against your live store, not a test fixture.</a:t>
-            </a:r>
-          </a:p>
-          <a:p>
-            <a:r>
-              <a:t>20,444</a:t>
-            </a:r>
-          </a:p>
-          <a:p>
-            <a:r>
-              <a:t>Orders analysed</a:t>
-            </a:r>
-          </a:p>
-          <a:p>
-            <a:r>
-              <a:t>11,224</a:t>
-            </a:r>
-          </a:p>
-          <a:p>
-            <a:r>
-              <a:t>Customers scored</a:t>
-            </a:r>
-          </a:p>
-          <a:p>
-            <a:r>
-              <a:t>0.7s</a:t>
-            </a:r>
-          </a:p>
-          <a:p>
-            <a:r>
-              <a:t>Typical page load</a:t>
-            </a:r>
-          </a:p>
-          <a:p>
-            <a:r>
-              <a:t>81%</a:t>
-            </a:r>
-          </a:p>
-          <a:p>
-            <a:r>
-              <a:t>Data transfer removed by trimming what is never read</a:t>
-            </a:r>
-          </a:p>
-          <a:p>
-            <a:r>
-              <a:t>Why it is fast</a:t>
-            </a:r>
-          </a:p>
-          <a:p>
-            <a:r>
-              <a:t>Your entire order history is pulled once and cached. Every</a:t>
-            </a:r>
-          </a:p>
-          <a:p>
-            <a:r>
-              <a:t>metric is computed from that cache, so changing a date range costs</a:t>
-            </a:r>
-          </a:p>
-          <a:p>
-            <a:r>
-              <a:t>milliseconds instead of another wait on your store.</a:t>
-            </a:r>
-          </a:p>
-          <a:p>
-            <a:r>
-              <a:t>Why your store stays fast</a:t>
-            </a:r>
-          </a:p>
-          <a:p>
-            <a:r>
-              <a:t>Analysis never touches the database serving your</a:t>
-            </a:r>
-          </a:p>
-          <a:p>
-            <a:r>
-              <a:t>storefront. Pulls are paced and retried, so a sync reads as ordinary</a:t>
-            </a:r>
-          </a:p>
-          <a:p>
-            <a:r>
-              <a:t>traffic rather than a spike.</a:t>
+              <a:t>What the market charges</a:t>
+            </a:r>
+          </a:p>
+          <a:p>
+            <a:r>
+              <a:t>Every platform bills monthly, then Meta bills again</a:t>
+            </a:r>
+          </a:p>
+          <a:p>
+            <a:r>
+              <a:t>Platform</a:t>
+            </a:r>
+          </a:p>
+          <a:p>
+            <a:r>
+              <a:t>Starting price</a:t>
+            </a:r>
+          </a:p>
+          <a:p>
+            <a:r>
+              <a:t>On top of that</a:t>
+            </a:r>
+          </a:p>
+          <a:p>
+            <a:r>
+              <a:t>AiSensy</a:t>
+            </a:r>
+          </a:p>
+          <a:p>
+            <a:r>
+              <a:t>₹1,500 / month</a:t>
+            </a:r>
+          </a:p>
+          <a:p>
+            <a:r>
+              <a:t>Meta message charges</a:t>
+            </a:r>
+          </a:p>
+          <a:p>
+            <a:r>
+              <a:t>Gallabox</a:t>
+            </a:r>
+          </a:p>
+          <a:p>
+            <a:r>
+              <a:t>≈ ₹2,399 / month</a:t>
+            </a:r>
+          </a:p>
+          <a:p>
+            <a:r>
+              <a:t>Interakt</a:t>
+            </a:r>
+          </a:p>
+          <a:p>
+            <a:r>
+              <a:t>≈ ₹2,799 / month</a:t>
+            </a:r>
+          </a:p>
+          <a:p>
+            <a:r>
+              <a:t>WATI</a:t>
+            </a:r>
+          </a:p>
+          <a:p>
+            <a:r>
+              <a:t>≈ $39 / month (₹3,300+)</a:t>
+            </a:r>
+          </a:p>
+          <a:p>
+            <a:r>
+              <a:t>Gupshup</a:t>
+            </a:r>
+          </a:p>
+          <a:p>
+            <a:r>
+              <a:t>Custom pricing</a:t>
+            </a:r>
+          </a:p>
+          <a:p>
+            <a:r>
+              <a:t>PulseCommerce, self-hosted</a:t>
+            </a:r>
+          </a:p>
+          <a:p>
+            <a:r>
+              <a:t>₹0 / month</a:t>
+            </a:r>
+          </a:p>
+          <a:p>
+            <a:r>
+              <a:t>Server hosting only, ≈ ₹500</a:t>
+            </a:r>
+          </a:p>
+          <a:p>
+            <a:r>
+              <a:t>Every one of these is a subscription you keep paying, and none of it covers</a:t>
+            </a:r>
+          </a:p>
+          <a:p>
+            <a:r>
+              <a:t>what Meta charges per conversation. A self-hosted gateway removes both the</a:t>
+            </a:r>
+          </a:p>
+          <a:p>
+            <a:r>
+              <a:t>subscription and the per-message fee, leaving a server bill.</a:t>
+            </a:r>
+          </a:p>
+          <a:p>
+            <a:r>
+              <a:t>* Publicly listed starting prices at the time of writing, converted where necessary. Prices, plans and inclusions change; confirm with each vendor.</a:t>
             </a:r>
           </a:p>
           <a:p>
@@ -4704,7 +4674,7 @@
           </a:p>
           <a:p>
             <a:r>
-              <a:t>12</a:t>
+              <a:t>Market</a:t>
             </a:r>
           </a:p>
         </p:txBody>
@@ -4774,102 +4744,172 @@
           <a:lstStyle/>
           <a:p>
             <a:r>
-              <a:t>Included</a:t>
-            </a:r>
-          </a:p>
-          <a:p>
-            <a:r>
-              <a:t>What you receive</a:t>
-            </a:r>
-          </a:p>
-          <a:p>
-            <a:r>
-              <a:t>The platform</a:t>
-            </a:r>
-          </a:p>
-          <a:p>
-            <a:r>
-              <a:t>, all thirteen modules, deployed and verified against your live store.</a:t>
-            </a:r>
-          </a:p>
-          <a:p>
-            <a:r>
-              <a:t>The source code</a:t>
-            </a:r>
-          </a:p>
-          <a:p>
-            <a:r>
-              <a:t>, in a repository Nature's Joy owns outright.</a:t>
-            </a:r>
-          </a:p>
-          <a:p>
-            <a:r>
-              <a:t>WhatsApp gateway</a:t>
-            </a:r>
-          </a:p>
-          <a:p>
-            <a:r>
-              <a:t>installed and connected on your server.</a:t>
-            </a:r>
-          </a:p>
-          <a:p>
-            <a:r>
-              <a:t>Documentation</a:t>
-            </a:r>
-          </a:p>
-          <a:p>
-            <a:r>
-              <a:t>covering setup, configuration, architecture and troubleshooting.</a:t>
-            </a:r>
-          </a:p>
-          <a:p>
-            <a:r>
-              <a:t>Metric definitions in writing</a:t>
-            </a:r>
-          </a:p>
-          <a:p>
-            <a:r>
-              <a:t>, so every figure can be reconciled against WooCommerce rather than taken on trust.</a:t>
-            </a:r>
-          </a:p>
-          <a:p>
-            <a:r>
-              <a:t>Handover session</a:t>
-            </a:r>
-          </a:p>
-          <a:p>
-            <a:r>
-              <a:t>covering day-to-day use and how to read each module.</a:t>
-            </a:r>
-          </a:p>
-          <a:p>
-            <a:r>
-              <a:t>Not included</a:t>
-            </a:r>
-          </a:p>
-          <a:p>
-            <a:r>
-              <a:t>Stated plainly so there are no surprises later.</a:t>
-            </a:r>
-          </a:p>
-          <a:p>
-            <a:r>
-              <a:t>Server hosting for the WhatsApp gateway, roughly ₹500 per month, billed</a:t>
-            </a:r>
-          </a:p>
-          <a:p>
-            <a:r>
-              <a:t>by your provider. Setups Works can manage it, quoted separately.</a:t>
-            </a:r>
-          </a:p>
-          <a:p>
-            <a:r>
-              <a:t>A dedicated phone number for WhatsApp sending, which should not be the</a:t>
-            </a:r>
-          </a:p>
-          <a:p>
-            <a:r>
-              <a:t>main business line.</a:t>
+              <a:t>Three years, your numbers</a:t>
+            </a:r>
+          </a:p>
+          <a:p>
+            <a:r>
+              <a:t>What each route actually costs</a:t>
+            </a:r>
+          </a:p>
+          <a:p>
+            <a:r>
+              <a:t>Twelve campaigns a year to your 11,224 customers, with Meta</a:t>
+            </a:r>
+          </a:p>
+          <a:p>
+            <a:r>
+              <a:t>conversations at ₹0.75.</a:t>
+            </a:r>
+          </a:p>
+          <a:p>
+            <a:r>
+              <a:t>*</a:t>
+            </a:r>
+          </a:p>
+          <a:p>
+            <a:r>
+              <a:t>Route</a:t>
+            </a:r>
+          </a:p>
+          <a:p>
+            <a:r>
+              <a:t>Subscription</a:t>
+            </a:r>
+          </a:p>
+          <a:p>
+            <a:r>
+              <a:t>Meta charges</a:t>
+            </a:r>
+          </a:p>
+          <a:p>
+            <a:r>
+              <a:t>Three-year total</a:t>
+            </a:r>
+          </a:p>
+          <a:p>
+            <a:r>
+              <a:t>AiSensy</a:t>
+            </a:r>
+          </a:p>
+          <a:p>
+            <a:r>
+              <a:t>₹54,000</a:t>
+            </a:r>
+          </a:p>
+          <a:p>
+            <a:r>
+              <a:t>₹3,03,048</a:t>
+            </a:r>
+          </a:p>
+          <a:p>
+            <a:r>
+              <a:t>₹3,57,048</a:t>
+            </a:r>
+          </a:p>
+          <a:p>
+            <a:r>
+              <a:t>Gallabox</a:t>
+            </a:r>
+          </a:p>
+          <a:p>
+            <a:r>
+              <a:t>₹86,364</a:t>
+            </a:r>
+          </a:p>
+          <a:p>
+            <a:r>
+              <a:t>₹3,89,412</a:t>
+            </a:r>
+          </a:p>
+          <a:p>
+            <a:r>
+              <a:t>Interakt</a:t>
+            </a:r>
+          </a:p>
+          <a:p>
+            <a:r>
+              <a:t>₹1,00,764</a:t>
+            </a:r>
+          </a:p>
+          <a:p>
+            <a:r>
+              <a:t>₹4,03,812</a:t>
+            </a:r>
+          </a:p>
+          <a:p>
+            <a:r>
+              <a:t>WATI</a:t>
+            </a:r>
+          </a:p>
+          <a:p>
+            <a:r>
+              <a:t>₹1,18,800</a:t>
+            </a:r>
+          </a:p>
+          <a:p>
+            <a:r>
+              <a:t>₹4,21,848</a:t>
+            </a:r>
+          </a:p>
+          <a:p>
+            <a:r>
+              <a:t>PulseCommerce + Cloud API</a:t>
+            </a:r>
+          </a:p>
+          <a:p>
+            <a:r>
+              <a:t>₹25,000 once</a:t>
+            </a:r>
+          </a:p>
+          <a:p>
+            <a:r>
+              <a:t>₹3,28,048</a:t>
+            </a:r>
+          </a:p>
+          <a:p>
+            <a:r>
+              <a:t>PulseCommerce + private gateway</a:t>
+            </a:r>
+          </a:p>
+          <a:p>
+            <a:r>
+              <a:t>₹35,000 once</a:t>
+            </a:r>
+          </a:p>
+          <a:p>
+            <a:r>
+              <a:t>₹0</a:t>
+            </a:r>
+          </a:p>
+          <a:p>
+            <a:r>
+              <a:t>₹53,000</a:t>
+            </a:r>
+          </a:p>
+          <a:p>
+            <a:r>
+              <a:t>Against the cheapest subscription platform, the private gateway saves</a:t>
+            </a:r>
+          </a:p>
+          <a:p>
+            <a:r>
+              <a:t>₹3,04,048 over three years</a:t>
+            </a:r>
+          </a:p>
+          <a:p>
+            <a:r>
+              <a:t>— roughly nine times what the build costs.</a:t>
+            </a:r>
+          </a:p>
+          <a:p>
+            <a:r>
+              <a:t>The saving is almost entirely the per-message fee that disappears.</a:t>
+            </a:r>
+          </a:p>
+          <a:p>
+            <a:r>
+              <a:t>* Meta's rates vary by country and category and change without notice. Volume assumption is illustrative. See the terms slides.</a:t>
             </a:r>
           </a:p>
           <a:p>
@@ -4879,7 +4919,7 @@
           </a:p>
           <a:p>
             <a:r>
-              <a:t>13</a:t>
+              <a:t>Three years</a:t>
             </a:r>
           </a:p>
         </p:txBody>
@@ -4949,107 +4989,162 @@
           <a:lstStyle/>
           <a:p>
             <a:r>
-              <a:t>Investment</a:t>
-            </a:r>
-          </a:p>
-          <a:p>
-            <a:r>
-              <a:t>₹20,000, one time</a:t>
-            </a:r>
-          </a:p>
-          <a:p>
-            <a:r>
-              <a:t>Item</a:t>
+              <a:t>Cost comparison</a:t>
+            </a:r>
+          </a:p>
+          <a:p>
+            <a:r>
+              <a:t>Two ways to send WhatsApp</a:t>
+            </a:r>
+          </a:p>
+          <a:p>
+            <a:r>
+              <a:t>Official WhatsApp Cloud API</a:t>
+            </a:r>
+          </a:p>
+          <a:p>
+            <a:r>
+              <a:t>PulseCommerce, self-hosted</a:t>
+            </a:r>
+          </a:p>
+          <a:p>
+            <a:r>
+              <a:t>Cost per message</a:t>
+            </a:r>
+          </a:p>
+          <a:p>
+            <a:r>
+              <a:t>Billed per conversation, in INR</a:t>
+            </a:r>
+          </a:p>
+          <a:p>
+            <a:r>
+              <a:t>Zero</a:t>
+            </a:r>
+          </a:p>
+          <a:p>
+            <a:r>
+              <a:t>Marketing messages</a:t>
+            </a:r>
+          </a:p>
+          <a:p>
+            <a:r>
+              <a:t>Charged at the marketing rate</a:t>
+            </a:r>
+          </a:p>
+          <a:p>
+            <a:r>
+              <a:t>No charge</a:t>
+            </a:r>
+          </a:p>
+          <a:p>
+            <a:r>
+              <a:t>Message templates</a:t>
+            </a:r>
+          </a:p>
+          <a:p>
+            <a:r>
+              <a:t>Pre-approval required by Meta</a:t>
+            </a:r>
+          </a:p>
+          <a:p>
+            <a:r>
+              <a:t>Write and send immediately</a:t>
+            </a:r>
+          </a:p>
+          <a:p>
+            <a:r>
+              <a:t>Setup</a:t>
+            </a:r>
+          </a:p>
+          <a:p>
+            <a:r>
+              <a:t>Meta Business verification</a:t>
+            </a:r>
+          </a:p>
+          <a:p>
+            <a:r>
+              <a:t>Scan a QR code</a:t>
+            </a:r>
+          </a:p>
+          <a:p>
+            <a:r>
+              <a:t>Running cost</a:t>
+            </a:r>
+          </a:p>
+          <a:p>
+            <a:r>
+              <a:t>Per conversation, forever</a:t>
+            </a:r>
+          </a:p>
+          <a:p>
+            <a:r>
+              <a:t>A small server, roughly ₹500/month</a:t>
+            </a:r>
+          </a:p>
+          <a:p>
+            <a:r>
+              <a:t>Tappable buttons</a:t>
+            </a:r>
+          </a:p>
+          <a:p>
+            <a:r>
+              <a:t>Yes</a:t>
+            </a:r>
+          </a:p>
+          <a:p>
+            <a:r>
+              <a:t>No — link previews instead</a:t>
+            </a:r>
+          </a:p>
+          <a:p>
+            <a:r>
+              <a:t>Delivery guarantee</a:t>
+            </a:r>
+          </a:p>
+          <a:p>
+            <a:r>
+              <a:t>Official, guaranteed</a:t>
+            </a:r>
+          </a:p>
+          <a:p>
+            <a:r>
+              <a:t>Unofficial; use a dedicated number</a:t>
+            </a:r>
+          </a:p>
+          <a:p>
+            <a:r>
+              <a:t>Meta's per-conversation rates change by country and category and should be</a:t>
+            </a:r>
+          </a:p>
+          <a:p>
+            <a:r>
+              <a:t>confirmed against their current published pricing before you commit. The</a:t>
+            </a:r>
+          </a:p>
+          <a:p>
+            <a:r>
+              <a:t>structural difference does not change: one bills per message, the other does</a:t>
+            </a:r>
+          </a:p>
+          <a:p>
+            <a:r>
+              <a:t>not.</a:t>
+            </a:r>
+          </a:p>
+          <a:p>
+            <a:r>
+              <a:t>* · Meta's per-conversation rates vary by country and message category and change over time; confirm against their current published pricing. ** · Hosting is an estimate, billed by your provider, not by Setups Works.</a:t>
+            </a:r>
+          </a:p>
+          <a:p>
+            <a:r>
+              <a:t>PulseCommerce</a:t>
             </a:r>
           </a:p>
           <a:p>
             <a:r>
               <a:t>Cost</a:t>
-            </a:r>
-          </a:p>
-          <a:p>
-            <a:r>
-              <a:t>Platform build, thirteen modules</a:t>
-            </a:r>
-          </a:p>
-          <a:p>
-            <a:r>
-              <a:t>Included</a:t>
-            </a:r>
-          </a:p>
-          <a:p>
-            <a:r>
-              <a:t>WhatsApp gateway setup and connection</a:t>
-            </a:r>
-          </a:p>
-          <a:p>
-            <a:r>
-              <a:t>Deployment, configuration and verification</a:t>
-            </a:r>
-          </a:p>
-          <a:p>
-            <a:r>
-              <a:t>Documentation and handover session</a:t>
-            </a:r>
-          </a:p>
-          <a:p>
-            <a:r>
-              <a:t>Source code ownership</a:t>
-            </a:r>
-          </a:p>
-          <a:p>
-            <a:r>
-              <a:t>Total, one time</a:t>
-            </a:r>
-          </a:p>
-          <a:p>
-            <a:r>
-              <a:t>₹20,000</a:t>
-            </a:r>
-          </a:p>
-          <a:p>
-            <a:r>
-              <a:t>*</a:t>
-            </a:r>
-          </a:p>
-          <a:p>
-            <a:r>
-              <a:t>₹0</a:t>
-            </a:r>
-          </a:p>
-          <a:p>
-            <a:r>
-              <a:t>Per message sent, permanently</a:t>
-            </a:r>
-          </a:p>
-          <a:p>
-            <a:r>
-              <a:t>2 campaigns</a:t>
-            </a:r>
-          </a:p>
-          <a:p>
-            <a:r>
-              <a:t>Until the build has paid for itself</a:t>
-            </a:r>
-          </a:p>
-          <a:p>
-            <a:r>
-              <a:t>₹37.1L</a:t>
-            </a:r>
-          </a:p>
-          <a:p>
-            <a:r>
-              <a:t>Lapsed customer value the first campaign targets</a:t>
-            </a:r>
-          </a:p>
-          <a:p>
-            <a:r>
-              <a:t>Setups Works</a:t>
-            </a:r>
-          </a:p>
-          <a:p>
-            <a:r>
-              <a:t>14</a:t>
             </a:r>
           </a:p>
         </p:txBody>
@@ -5119,72 +5214,42 @@
           <a:lstStyle/>
           <a:p>
             <a:r>
-              <a:t>Complete feature list · 1 of 2</a:t>
-            </a:r>
-          </a:p>
-          <a:p>
-            <a:r>
-              <a:t>Everything included, analytics</a:t>
-            </a:r>
-          </a:p>
-          <a:p>
-            <a:r>
-              <a:t>Revenue</a:t>
-            </a:r>
-          </a:p>
-          <a:p>
-            <a:r>
-              <a:t>Net and gross revenue · orders · average order value · units · discounts · shipping · tax · refunds · items per order · revenue per customer · cancellation rate · period-on-period comparison · day, week and month views · sparkline trends · generated findings ranked by urgency</a:t>
-            </a:r>
-          </a:p>
-          <a:p>
-            <a:r>
-              <a:t>Customers</a:t>
-            </a:r>
-          </a:p>
-          <a:p>
-            <a:r>
-              <a:t>RFM scoring · ten segments · five value tiers · predicted lifetime value · churn risk · revenue deciles · Pareto curve · Gini coefficient · recency-frequency plot · top-customer spotlight · high value, low value, at risk and rising cohorts · full ledger with expandable orders</a:t>
-            </a:r>
-          </a:p>
-          <a:p>
-            <a:r>
-              <a:t>Acquisition</a:t>
-            </a:r>
-          </a:p>
-          <a:p>
-            <a:r>
-              <a:t>New versus returning revenue · full customer tables · channel attribution · first-time buyer analysis by channel · device breakdown · pages per session · time to second order with quartiles · monthly cohort retention · cumulative lifetime value curve · attribution coverage</a:t>
-            </a:r>
-          </a:p>
-          <a:p>
-            <a:r>
-              <a:t>Products</a:t>
-            </a:r>
-          </a:p>
-          <a:p>
-            <a:r>
-              <a:t>ABC classification · Pareto concentration · revenue, units, orders and customers per product · price and velocity · refund rate per product · average rating · market-basket affinity by lift · category mix · best sellers by value and volume · slow movers · never-sold items</a:t>
-            </a:r>
-          </a:p>
-          <a:p>
-            <a:r>
-              <a:t>Inventory</a:t>
-            </a:r>
-          </a:p>
-          <a:p>
-            <a:r>
-              <a:t>Days of cover · reorder points from your lead time · suggested order quantities · out of stock, critical, low, healthy and overstocked states · revenue at risk · capital tied up · restock planner · draft purchase order export</a:t>
-            </a:r>
-          </a:p>
-          <a:p>
-            <a:r>
-              <a:t>Operations &amp; forecast</a:t>
-            </a:r>
-          </a:p>
-          <a:p>
-            <a:r>
-              <a:t>Full order register · status mix · basket-size distribution · payment method performance · day-by-hour trading heatmap · weekday performance · fulfilment timing · daily revenue projection · 95% confidence band · weekday seasonality · geography by state, city and region</a:t>
+              <a:t>Cost at your scale</a:t>
+            </a:r>
+          </a:p>
+          <a:p>
+            <a:r>
+              <a:t>One campaign to your customer base</a:t>
+            </a:r>
+          </a:p>
+          <a:p>
+            <a:r>
+              <a:t>11,224 customers. Because the exact Meta rate varies, here is the cost across</a:t>
+            </a:r>
+          </a:p>
+          <a:p>
+            <a:r>
+              <a:t>the plausible range — and what it becomes at one campaign a month.</a:t>
+            </a:r>
+          </a:p>
+          <a:p>
+            <a:r>
+              <a:t>If a marketing conversation costs</a:t>
+            </a:r>
+          </a:p>
+          <a:p>
+            <a:r>
+              <a:t>*</a:t>
+            </a:r>
+          </a:p>
+          <a:p>
+            <a:r>
+              <a:t>One campaign</a:t>
+            </a:r>
+          </a:p>
+          <a:p>
+            <a:r>
+              <a:t>Monthly, for a year</a:t>
             </a:r>
           </a:p>
           <a:p>
@@ -5194,7 +5259,82 @@
           </a:p>
           <a:p>
             <a:r>
-              <a:t>Features</a:t>
+              <a:t>₹0.50</a:t>
+            </a:r>
+          </a:p>
+          <a:p>
+            <a:r>
+              <a:t>₹5,612</a:t>
+            </a:r>
+          </a:p>
+          <a:p>
+            <a:r>
+              <a:t>₹67,344</a:t>
+            </a:r>
+          </a:p>
+          <a:p>
+            <a:r>
+              <a:t>₹0</a:t>
+            </a:r>
+          </a:p>
+          <a:p>
+            <a:r>
+              <a:t>₹0.75</a:t>
+            </a:r>
+          </a:p>
+          <a:p>
+            <a:r>
+              <a:t>₹8,418</a:t>
+            </a:r>
+          </a:p>
+          <a:p>
+            <a:r>
+              <a:t>₹1,01,016</a:t>
+            </a:r>
+          </a:p>
+          <a:p>
+            <a:r>
+              <a:t>₹1.00</a:t>
+            </a:r>
+          </a:p>
+          <a:p>
+            <a:r>
+              <a:t>₹11,224</a:t>
+            </a:r>
+          </a:p>
+          <a:p>
+            <a:r>
+              <a:t>₹1,34,688</a:t>
+            </a:r>
+          </a:p>
+          <a:p>
+            <a:r>
+              <a:t>4 campaigns</a:t>
+            </a:r>
+          </a:p>
+          <a:p>
+            <a:r>
+              <a:t>Break-even on the ₹35,000 private gateway, at the middle rate</a:t>
+            </a:r>
+          </a:p>
+          <a:p>
+            <a:r>
+              <a:t>₹60,016</a:t>
+            </a:r>
+          </a:p>
+          <a:p>
+            <a:r>
+              <a:t>Saved in year one at one campaign a month, after the build and hosting</a:t>
+            </a:r>
+          </a:p>
+          <a:p>
+            <a:r>
+              <a:t>Meta charges avoided on every single campaign</a:t>
+            </a:r>
+          </a:p>
+          <a:p>
+            <a:r>
+              <a:t>11</a:t>
             </a:r>
           </a:p>
         </p:txBody>
@@ -5264,72 +5404,97 @@
           <a:lstStyle/>
           <a:p>
             <a:r>
-              <a:t>Complete feature list · 2 of 2</a:t>
-            </a:r>
-          </a:p>
-          <a:p>
-            <a:r>
-              <a:t>Everything included, messaging and platform</a:t>
-            </a:r>
-          </a:p>
-          <a:p>
-            <a:r>
-              <a:t>Campaigns</a:t>
-            </a:r>
-          </a:p>
-          <a:p>
-            <a:r>
-              <a:t>Audience builder with live reach · six goal presets · filters on segment, tier, recency, spend, orders, churn risk, country, account type, product bought and contactability · revenue and predicted value at stake · CSV export for email and ads platforms · campaign performance from UTM tags · coupon return on discount</a:t>
-            </a:r>
-          </a:p>
-          <a:p>
-            <a:r>
-              <a:t>WhatsApp</a:t>
-            </a:r>
-          </a:p>
-          <a:p>
-            <a:r>
-              <a:t>Text, image and video · nine templates · ten personalisation variables · per-customer product photos · catalogue product picker · coupon creation and attachment · dry run · test send · typed confirmation · opt-out list · paced sending with jitter · resumable jobs · automatic recovery · live progress and stop control</a:t>
-            </a:r>
-          </a:p>
-          <a:p>
-            <a:r>
-              <a:t>Inbox</a:t>
-            </a:r>
-          </a:p>
-          <a:p>
-            <a:r>
-              <a:t>Conversations matched to customers · order count and lifetime spend beside each · link to full profile · live reply polling · text, media and product replies · start a conversation from a number · unread counts · search across names and numbers · opt-out honoured</a:t>
-            </a:r>
-          </a:p>
-          <a:p>
-            <a:r>
-              <a:t>Reports</a:t>
-            </a:r>
-          </a:p>
-          <a:p>
-            <a:r>
-              <a:t>Ten report types · Excel with formatted sheets, filters and currency formats · PDF with cover, KPIs and findings · CSV for pipelines · board pack, CRM upload, merchandising and finance presets · written report view · exports match the on-screen date range and are never truncated</a:t>
-            </a:r>
-          </a:p>
-          <a:p>
-            <a:r>
-              <a:t>Platform</a:t>
-            </a:r>
-          </a:p>
-          <a:p>
-            <a:r>
-              <a:t>Multiple stores with instant switching · command palette across customers, products and orders · keyboard navigation throughout · light and dark themes · persisted date ranges · sortable, searchable, expandable tables · optional password protection · honest empty states · partial-data warnings surfaced</a:t>
-            </a:r>
-          </a:p>
-          <a:p>
-            <a:r>
-              <a:t>Security</a:t>
-            </a:r>
-          </a:p>
-          <a:p>
-            <a:r>
-              <a:t>Approval inside your own WordPress admin · no credential ever typed into a form · verified before saving · keys shown masked · phone numbers never sent to the browser · opt-outs enforced on the server · one-click disconnect wipes everything cached</a:t>
+              <a:t>Engineering</a:t>
+            </a:r>
+          </a:p>
+          <a:p>
+            <a:r>
+              <a:t>Built for a store your size</a:t>
+            </a:r>
+          </a:p>
+          <a:p>
+            <a:r>
+              <a:t>Measured against your live store, not a test fixture.</a:t>
+            </a:r>
+          </a:p>
+          <a:p>
+            <a:r>
+              <a:t>20,444</a:t>
+            </a:r>
+          </a:p>
+          <a:p>
+            <a:r>
+              <a:t>Orders analysed</a:t>
+            </a:r>
+          </a:p>
+          <a:p>
+            <a:r>
+              <a:t>11,224</a:t>
+            </a:r>
+          </a:p>
+          <a:p>
+            <a:r>
+              <a:t>Customers scored</a:t>
+            </a:r>
+          </a:p>
+          <a:p>
+            <a:r>
+              <a:t>0.7s</a:t>
+            </a:r>
+          </a:p>
+          <a:p>
+            <a:r>
+              <a:t>Typical page load</a:t>
+            </a:r>
+          </a:p>
+          <a:p>
+            <a:r>
+              <a:t>81%</a:t>
+            </a:r>
+          </a:p>
+          <a:p>
+            <a:r>
+              <a:t>Data transfer removed by trimming what is never read</a:t>
+            </a:r>
+          </a:p>
+          <a:p>
+            <a:r>
+              <a:t>Why it is fast</a:t>
+            </a:r>
+          </a:p>
+          <a:p>
+            <a:r>
+              <a:t>Your entire order history is pulled once and cached. Every</a:t>
+            </a:r>
+          </a:p>
+          <a:p>
+            <a:r>
+              <a:t>metric is computed from that cache, so changing a date range costs</a:t>
+            </a:r>
+          </a:p>
+          <a:p>
+            <a:r>
+              <a:t>milliseconds instead of another wait on your store.</a:t>
+            </a:r>
+          </a:p>
+          <a:p>
+            <a:r>
+              <a:t>Why your store stays fast</a:t>
+            </a:r>
+          </a:p>
+          <a:p>
+            <a:r>
+              <a:t>Analysis never touches the database serving your</a:t>
+            </a:r>
+          </a:p>
+          <a:p>
+            <a:r>
+              <a:t>storefront. Pulls are paced and retried, so a sync reads as ordinary</a:t>
+            </a:r>
+          </a:p>
+          <a:p>
+            <a:r>
+              <a:t>traffic rather than a spike.</a:t>
             </a:r>
           </a:p>
           <a:p>
@@ -5339,7 +5504,7 @@
           </a:p>
           <a:p>
             <a:r>
-              <a:t>Features</a:t>
+              <a:t>12</a:t>
             </a:r>
           </a:p>
         </p:txBody>
@@ -5409,202 +5574,112 @@
           <a:lstStyle/>
           <a:p>
             <a:r>
-              <a:t>Terms &amp; conditions · 1 of 2</a:t>
-            </a:r>
-          </a:p>
-          <a:p>
-            <a:r>
-              <a:t>What the figures mean</a:t>
-            </a:r>
-          </a:p>
-          <a:p>
-            <a:r>
-              <a:t>Measurement window</a:t>
-            </a:r>
-          </a:p>
-          <a:p>
-            <a:r>
-              <a:t>All store figures were computed from</a:t>
-            </a:r>
-          </a:p>
-          <a:p>
-            <a:r>
-              <a:t>naturesjoystore.com covering 1 August 2025 to 31 July 2026, across 20,444 orders</a:t>
-            </a:r>
-          </a:p>
-          <a:p>
-            <a:r>
-              <a:t>retrieved through the WooCommerce REST API. Figures change as the store trades and</a:t>
-            </a:r>
-          </a:p>
-          <a:p>
-            <a:r>
-              <a:t>should be re-run before being relied upon.</a:t>
-            </a:r>
-          </a:p>
-          <a:p>
-            <a:r>
-              <a:t>How revenue is counted</a:t>
-            </a:r>
-          </a:p>
-          <a:p>
-            <a:r>
-              <a:t>Net revenue is order total less tax, shipping</a:t>
-            </a:r>
-          </a:p>
-          <a:p>
-            <a:r>
-              <a:t>and refunds, counting only orders in completed, processing or on-hold status. Cancelled,</a:t>
-            </a:r>
-          </a:p>
-          <a:p>
-            <a:r>
-              <a:t>failed and pending orders are excluded from revenue but included in cancellation rates.</a:t>
-            </a:r>
-          </a:p>
-          <a:p>
-            <a:r>
-              <a:t>This may differ from figures shown elsewhere in WooCommerce, which counts differently.</a:t>
-            </a:r>
-          </a:p>
-          <a:p>
-            <a:r>
-              <a:t>How customers are counted</a:t>
-            </a:r>
-          </a:p>
-          <a:p>
-            <a:r>
-              <a:t>Guest checkouts carry no WooCommerce customer</a:t>
-            </a:r>
-          </a:p>
-          <a:p>
-            <a:r>
-              <a:t>ID, so buyers are identified by billing email address. One person ordering under two email</a:t>
-            </a:r>
-          </a:p>
-          <a:p>
-            <a:r>
-              <a:t>addresses counts as two customers. Customer counts and repeat rates are affected accordingly.</a:t>
-            </a:r>
-          </a:p>
-          <a:p>
-            <a:r>
-              <a:t>Projections and illustrations</a:t>
-            </a:r>
-          </a:p>
-          <a:p>
-            <a:r>
-              <a:t>Win-back revenue, campaign returns, break-even points and forecasts are</a:t>
-            </a:r>
-          </a:p>
-          <a:p>
-            <a:r>
-              <a:t>illustrations based on stated assumptions. They are not forecasts, guarantees, warranties</a:t>
-            </a:r>
-          </a:p>
-          <a:p>
-            <a:r>
-              <a:t>or commitments of any kind. Actual results will differ, potentially materially.</a:t>
-            </a:r>
-          </a:p>
-          <a:p>
-            <a:r>
-              <a:t>Statistical limits</a:t>
-            </a:r>
-          </a:p>
-          <a:p>
-            <a:r>
-              <a:t>Predicted lifetime value and churn risk are</a:t>
-            </a:r>
-          </a:p>
-          <a:p>
-            <a:r>
-              <a:t>estimates derived from observed purchase behaviour. Forecasts use a least-squares trend with</a:t>
-            </a:r>
-          </a:p>
-          <a:p>
-            <a:r>
-              <a:t>day-of-week seasonality and know nothing of planned promotions, stock availability, price</a:t>
-            </a:r>
-          </a:p>
-          <a:p>
-            <a:r>
-              <a:t>changes or seasonality outside the period analysed.</a:t>
-            </a:r>
-          </a:p>
-          <a:p>
-            <a:r>
-              <a:t>Third-party pricing</a:t>
-            </a:r>
-          </a:p>
-          <a:p>
-            <a:r>
-              <a:t>WhatsApp Cloud API rates are set by Meta, vary by</a:t>
-            </a:r>
-          </a:p>
-          <a:p>
-            <a:r>
-              <a:t>country and message category, and change without notice. The rates shown are illustrative</a:t>
-            </a:r>
-          </a:p>
-          <a:p>
-            <a:r>
-              <a:t>ranges, not quotations. Confirm current pricing with Meta before making a decision on that basis.</a:t>
-            </a:r>
-          </a:p>
-          <a:p>
-            <a:r>
-              <a:t>Costs not included</a:t>
-            </a:r>
-          </a:p>
-          <a:p>
-            <a:r>
-              <a:t>Server hosting for the WhatsApp gateway, estimated</a:t>
-            </a:r>
-          </a:p>
-          <a:p>
-            <a:r>
-              <a:t>at approximately ₹500 per month, is billed by your hosting provider and is not included in the</a:t>
-            </a:r>
-          </a:p>
-          <a:p>
-            <a:r>
-              <a:t>quoted price. A dedicated phone number for WhatsApp sending is also not included. Domain,</a:t>
-            </a:r>
-          </a:p>
-          <a:p>
-            <a:r>
-              <a:t>SSL and WooCommerce hosting remain your existing arrangements.</a:t>
-            </a:r>
-          </a:p>
-          <a:p>
-            <a:r>
-              <a:t>Inventory figures</a:t>
-            </a:r>
-          </a:p>
-          <a:p>
-            <a:r>
-              <a:t>Days of cover and revenue at risk are calculated from observed sales velocity</a:t>
-            </a:r>
-          </a:p>
-          <a:p>
-            <a:r>
-              <a:t>and current stock levels where WooCommerce tracks them. Products without stock management</a:t>
-            </a:r>
-          </a:p>
-          <a:p>
-            <a:r>
-              <a:t>enabled cannot be planned for.</a:t>
-            </a:r>
-          </a:p>
-          <a:p>
-            <a:r>
-              <a:t>Setups Works · setups.works</a:t>
-            </a:r>
-          </a:p>
-          <a:p>
-            <a:r>
-              <a:t>Terms 1 / 2</a:t>
+              <a:t>Included</a:t>
+            </a:r>
+          </a:p>
+          <a:p>
+            <a:r>
+              <a:t>What you receive</a:t>
+            </a:r>
+          </a:p>
+          <a:p>
+            <a:r>
+              <a:t>The platform</a:t>
+            </a:r>
+          </a:p>
+          <a:p>
+            <a:r>
+              <a:t>, all thirteen modules, deployed and verified against your live store.</a:t>
+            </a:r>
+          </a:p>
+          <a:p>
+            <a:r>
+              <a:t>The source code</a:t>
+            </a:r>
+          </a:p>
+          <a:p>
+            <a:r>
+              <a:t>, in a repository Nature's Joy owns outright.</a:t>
+            </a:r>
+          </a:p>
+          <a:p>
+            <a:r>
+              <a:t>WhatsApp gateway</a:t>
+            </a:r>
+          </a:p>
+          <a:p>
+            <a:r>
+              <a:t>installed and connected on your server.</a:t>
+            </a:r>
+          </a:p>
+          <a:p>
+            <a:r>
+              <a:t>Documentation</a:t>
+            </a:r>
+          </a:p>
+          <a:p>
+            <a:r>
+              <a:t>covering setup, configuration, architecture and troubleshooting.</a:t>
+            </a:r>
+          </a:p>
+          <a:p>
+            <a:r>
+              <a:t>Metric definitions in writing</a:t>
+            </a:r>
+          </a:p>
+          <a:p>
+            <a:r>
+              <a:t>, so every figure can be reconciled against WooCommerce rather than taken on trust.</a:t>
+            </a:r>
+          </a:p>
+          <a:p>
+            <a:r>
+              <a:t>Handover session</a:t>
+            </a:r>
+          </a:p>
+          <a:p>
+            <a:r>
+              <a:t>covering day-to-day use and how to read each module.</a:t>
+            </a:r>
+          </a:p>
+          <a:p>
+            <a:r>
+              <a:t>Not included</a:t>
+            </a:r>
+          </a:p>
+          <a:p>
+            <a:r>
+              <a:t>Stated plainly so there are no surprises later.</a:t>
+            </a:r>
+          </a:p>
+          <a:p>
+            <a:r>
+              <a:t>Server hosting for the WhatsApp gateway, roughly ₹500 per month, billed</a:t>
+            </a:r>
+          </a:p>
+          <a:p>
+            <a:r>
+              <a:t>by your provider. Setups Works can manage it, quoted separately.</a:t>
+            </a:r>
+          </a:p>
+          <a:p>
+            <a:r>
+              <a:t>A dedicated phone number for WhatsApp sending, which should not be the</a:t>
+            </a:r>
+          </a:p>
+          <a:p>
+            <a:r>
+              <a:t>main business line.</a:t>
+            </a:r>
+          </a:p>
+          <a:p>
+            <a:r>
+              <a:t>PulseCommerce</a:t>
+            </a:r>
+          </a:p>
+          <a:p>
+            <a:r>
+              <a:t>13</a:t>
             </a:r>
           </a:p>
         </p:txBody>
@@ -5674,212 +5749,127 @@
           <a:lstStyle/>
           <a:p>
             <a:r>
-              <a:t>Terms &amp; conditions · 2 of 2</a:t>
-            </a:r>
-          </a:p>
-          <a:p>
-            <a:r>
-              <a:t>Delivery, risk and the quote</a:t>
-            </a:r>
-          </a:p>
-          <a:p>
-            <a:r>
-              <a:t>WhatsApp delivery is not guaranteed</a:t>
-            </a:r>
-          </a:p>
-          <a:p>
-            <a:r>
-              <a:t>Messaging uses a self-hosted gateway connecting</a:t>
-            </a:r>
-          </a:p>
-          <a:p>
-            <a:r>
-              <a:t>through unofficial, reverse-engineered clients rather than Meta's official WhatsApp Business</a:t>
-            </a:r>
-          </a:p>
-          <a:p>
-            <a:r>
-              <a:t>API. Message delivery is not guaranteed. WhatsApp may, at its sole discretion and without</a:t>
-            </a:r>
-          </a:p>
-          <a:p>
-            <a:r>
-              <a:t>notice, restrict, suspend or permanently ban any number used for automated messaging. No</a:t>
-            </a:r>
-          </a:p>
-          <a:p>
-            <a:r>
-              <a:t>appeal route exists through this software or through Setups Works.</a:t>
-            </a:r>
-          </a:p>
-          <a:p>
-            <a:r>
-              <a:t>Use a dedicated number</a:t>
-            </a:r>
-          </a:p>
-          <a:p>
-            <a:r>
-              <a:t>A number reserved for this purpose must be used,</a:t>
-            </a:r>
-          </a:p>
-          <a:p>
-            <a:r>
-              <a:t>never the primary business line. Setups Works accepts no liability for the restriction, loss</a:t>
-            </a:r>
-          </a:p>
-          <a:p>
-            <a:r>
-              <a:t>or suspension of any number, for messages that fail to deliver, or for consequential business</a:t>
-            </a:r>
-          </a:p>
-          <a:p>
-            <a:r>
-              <a:t>loss arising from either.</a:t>
-            </a:r>
-          </a:p>
-          <a:p>
-            <a:r>
-              <a:t>Your responsibility when messaging</a:t>
-            </a:r>
-          </a:p>
-          <a:p>
-            <a:r>
-              <a:t>You are responsible for ensuring messages sent</a:t>
-            </a:r>
-          </a:p>
-          <a:p>
-            <a:r>
-              <a:t>comply with applicable law, including consent, data protection and unsolicited-communication</a:t>
-            </a:r>
-          </a:p>
-          <a:p>
-            <a:r>
-              <a:t>rules in the recipient's jurisdiction, and with WhatsApp's own terms. The opt-out list is</a:t>
-            </a:r>
-          </a:p>
-          <a:p>
-            <a:r>
-              <a:t>provided as a tool; honouring requests to stop remains your obligation.</a:t>
-            </a:r>
-          </a:p>
-          <a:p>
-            <a:r>
-              <a:t>Features outside this route</a:t>
-            </a:r>
-          </a:p>
-          <a:p>
-            <a:r>
-              <a:t>Tappable buttons and product cards are features of Meta's official API and</a:t>
-            </a:r>
-          </a:p>
-          <a:p>
-            <a:r>
-              <a:t>cannot be delivered by a self-hosted gateway. They are excluded from this scope.</a:t>
-            </a:r>
-          </a:p>
-          <a:p>
-            <a:r>
-              <a:t>Your data</a:t>
-            </a:r>
-          </a:p>
-          <a:p>
-            <a:r>
-              <a:t>All store and customer data remains the property</a:t>
-            </a:r>
-          </a:p>
-          <a:p>
-            <a:r>
-              <a:t>of Nature's Joy and stays on infrastructure you control. No data is transmitted to Setups</a:t>
-            </a:r>
-          </a:p>
-          <a:p>
-            <a:r>
-              <a:t>Works or to any third-party analytics or messaging service. Store access is read-only with a</a:t>
-            </a:r>
-          </a:p>
-          <a:p>
-            <a:r>
-              <a:t>single exception: creating the discount coupons you request. Access can be revoked at any time</a:t>
-            </a:r>
-          </a:p>
-          <a:p>
-            <a:r>
-              <a:t>from WordPress without notice to us.</a:t>
-            </a:r>
-          </a:p>
-          <a:p>
-            <a:r>
-              <a:t>Scope and ownership</a:t>
-            </a:r>
-          </a:p>
-          <a:p>
-            <a:r>
-              <a:t>₹20,000 covers the build, deployment,</a:t>
-            </a:r>
-          </a:p>
-          <a:p>
-            <a:r>
-              <a:t>configuration, documentation and handover of the thirteen modules described in this document.</a:t>
-            </a:r>
-          </a:p>
-          <a:p>
-            <a:r>
-              <a:t>Source code is delivered to a repository owned by Nature's Joy. Work outside this scope,</a:t>
-            </a:r>
-          </a:p>
-          <a:p>
-            <a:r>
-              <a:t>including additional modules, custom metrics, integrations or ongoing support, is quoted</a:t>
-            </a:r>
-          </a:p>
-          <a:p>
-            <a:r>
-              <a:t>separately.</a:t>
-            </a:r>
-          </a:p>
-          <a:p>
-            <a:r>
-              <a:t>Validity and payment</a:t>
-            </a:r>
-          </a:p>
-          <a:p>
-            <a:r>
-              <a:t>This quotation is valid for 30 days from the date</a:t>
-            </a:r>
-          </a:p>
-          <a:p>
-            <a:r>
-              <a:t>of issue. Payment terms to be agreed in writing before work commences.</a:t>
-            </a:r>
-          </a:p>
-          <a:p>
-            <a:r>
-              <a:t>Third-party software</a:t>
-            </a:r>
-          </a:p>
-          <a:p>
-            <a:r>
-              <a:t>The WhatsApp gateway is independent open-source software, provided under its</a:t>
-            </a:r>
-          </a:p>
-          <a:p>
-            <a:r>
-              <a:t>own licence and maintained by its own authors. Setups Works does not control its development,</a:t>
-            </a:r>
-          </a:p>
-          <a:p>
-            <a:r>
-              <a:t>availability or continued compatibility with WhatsApp.</a:t>
-            </a:r>
-          </a:p>
-          <a:p>
-            <a:r>
-              <a:t>Setups Works · setups.works</a:t>
-            </a:r>
-          </a:p>
-          <a:p>
-            <a:r>
-              <a:t>Terms 2 / 2</a:t>
+              <a:t>The messaging layer</a:t>
+            </a:r>
+          </a:p>
+          <a:p>
+            <a:r>
+              <a:t>Your own private WhatsApp gateway</a:t>
+            </a:r>
+          </a:p>
+          <a:p>
+            <a:r>
+              <a:t>A dedicated WhatsApp messaging server, running on infrastructure</a:t>
+            </a:r>
+          </a:p>
+          <a:p>
+            <a:r>
+              <a:t>Nature's Joy controls. Not a shared platform, not a reseller account.</a:t>
+            </a:r>
+          </a:p>
+          <a:p>
+            <a:r>
+              <a:t>Nobody between you and WhatsApp</a:t>
+            </a:r>
+          </a:p>
+          <a:p>
+            <a:r>
+              <a:t>No platform sits in the middle holding your customer list, your message</a:t>
+            </a:r>
+          </a:p>
+          <a:p>
+            <a:r>
+              <a:t>history or your number. The gateway is yours, on your server.</a:t>
+            </a:r>
+          </a:p>
+          <a:p>
+            <a:r>
+              <a:t>No per-message fee, ever</a:t>
+            </a:r>
+          </a:p>
+          <a:p>
+            <a:r>
+              <a:t>Messages cost nothing to send. The only running cost is the server</a:t>
+            </a:r>
+          </a:p>
+          <a:p>
+            <a:r>
+              <a:t>itself, roughly ₹500 a month, billed by your host.</a:t>
+            </a:r>
+          </a:p>
+          <a:p>
+            <a:r>
+              <a:t>No subscription to cancel</a:t>
+            </a:r>
+          </a:p>
+          <a:p>
+            <a:r>
+              <a:t>Nothing to renew, no plan to outgrow, no price rise. The software is</a:t>
+            </a:r>
+          </a:p>
+          <a:p>
+            <a:r>
+              <a:t>yours with the source code.</a:t>
+            </a:r>
+          </a:p>
+          <a:p>
+            <a:r>
+              <a:t>What you give up</a:t>
+            </a:r>
+          </a:p>
+          <a:p>
+            <a:r>
+              <a:t>Delivery is not guaranteed the way Meta's official API</a:t>
+            </a:r>
+          </a:p>
+          <a:p>
+            <a:r>
+              <a:t>guarantees it, tappable buttons are unavailable, and WhatsApp may restrict</a:t>
+            </a:r>
+          </a:p>
+          <a:p>
+            <a:r>
+              <a:t>the number used. A dedicated number is essential.</a:t>
+            </a:r>
+          </a:p>
+          <a:p>
+            <a:r>
+              <a:t>*</a:t>
+            </a:r>
+          </a:p>
+          <a:p>
+            <a:r>
+              <a:t>Who it suits</a:t>
+            </a:r>
+          </a:p>
+          <a:p>
+            <a:r>
+              <a:t>A store messaging its own past customers at volume, where</a:t>
+            </a:r>
+          </a:p>
+          <a:p>
+            <a:r>
+              <a:t>the per-message fee dominates the cost and an occasional undelivered</a:t>
+            </a:r>
+          </a:p>
+          <a:p>
+            <a:r>
+              <a:t>message is tolerable.</a:t>
+            </a:r>
+          </a:p>
+          <a:p>
+            <a:r>
+              <a:t>* See the terms slides. If guaranteed delivery matters more than cost, the Cloud API option below is the right choice.</a:t>
+            </a:r>
+          </a:p>
+          <a:p>
+            <a:r>
+              <a:t>PulseCommerce</a:t>
+            </a:r>
+          </a:p>
+          <a:p>
+            <a:r>
+              <a:t>Gateway</a:t>
             </a:r>
           </a:p>
         </p:txBody>
@@ -5949,87 +5939,247 @@
           <a:lstStyle/>
           <a:p>
             <a:r>
-              <a:t>Next steps</a:t>
-            </a:r>
-          </a:p>
-          <a:p>
-            <a:r>
-              <a:t>How this proceeds</a:t>
-            </a:r>
-          </a:p>
-          <a:p>
-            <a:r>
-              <a:t>Step 1</a:t>
-            </a:r>
-          </a:p>
-          <a:p>
-            <a:r>
-              <a:t>Confirm scope</a:t>
-            </a:r>
-          </a:p>
-          <a:p>
-            <a:r>
-              <a:t>Agree which modules matter most and confirm the commercial terms.</a:t>
-            </a:r>
-          </a:p>
-          <a:p>
-            <a:r>
-              <a:t>Step 2</a:t>
-            </a:r>
-          </a:p>
-          <a:p>
-            <a:r>
-              <a:t>Walkthrough</a:t>
-            </a:r>
-          </a:p>
-          <a:p>
-            <a:r>
-              <a:t>See the platform running against your own data, before rollout.</a:t>
-            </a:r>
-          </a:p>
-          <a:p>
-            <a:r>
-              <a:t>Step 3</a:t>
-            </a:r>
-          </a:p>
-          <a:p>
-            <a:r>
-              <a:t>Deploy</a:t>
-            </a:r>
-          </a:p>
-          <a:p>
-            <a:r>
-              <a:t>Platform and gateway set up on your infrastructure and verified.</a:t>
-            </a:r>
-          </a:p>
-          <a:p>
-            <a:r>
-              <a:t>Step 4</a:t>
-            </a:r>
-          </a:p>
-          <a:p>
-            <a:r>
-              <a:t>Handover</a:t>
-            </a:r>
-          </a:p>
-          <a:p>
-            <a:r>
-              <a:t>Training, documentation, and the code in your own repository.</a:t>
-            </a:r>
-          </a:p>
-          <a:p>
-            <a:r>
-              <a:t>Nitheesh Rajendran</a:t>
-            </a:r>
-          </a:p>
-          <a:p>
-            <a:r>
-              <a:t>Founder &amp; Developer · Setups Works</a:t>
-            </a:r>
-          </a:p>
-          <a:p>
-            <a:r>
-              <a:t>setups.works · linkedin.com/in/nitheeshdr</a:t>
+              <a:t>Investment</a:t>
+            </a:r>
+          </a:p>
+          <a:p>
+            <a:r>
+              <a:t>Two ways to buy it</a:t>
+            </a:r>
+          </a:p>
+          <a:p>
+            <a:r>
+              <a:t>₹25,000</a:t>
+            </a:r>
+          </a:p>
+          <a:p>
+            <a:r>
+              <a:t>PulseCommerce + WhatsApp Cloud API</a:t>
+            </a:r>
+          </a:p>
+          <a:p>
+            <a:r>
+              <a:t>All thirteen modules</a:t>
+            </a:r>
+          </a:p>
+          <a:p>
+            <a:r>
+              <a:t>Meta's official API — guaranteed delivery</a:t>
+            </a:r>
+          </a:p>
+          <a:p>
+            <a:r>
+              <a:t>Tappable buttons available</a:t>
+            </a:r>
+          </a:p>
+          <a:p>
+            <a:r>
+              <a:t>No server to run</a:t>
+            </a:r>
+          </a:p>
+          <a:p>
+            <a:r>
+              <a:t>You pay Meta per conversation</a:t>
+            </a:r>
+          </a:p>
+          <a:p>
+            <a:r>
+              <a:t>Templates need Meta approval</a:t>
+            </a:r>
+          </a:p>
+          <a:p>
+            <a:r>
+              <a:t>₹35,000</a:t>
+            </a:r>
+          </a:p>
+          <a:p>
+            <a:r>
+              <a:t>PulseCommerce + private WhatsApp gateway</a:t>
+            </a:r>
+          </a:p>
+          <a:p>
+            <a:r>
+              <a:t>Dedicated messaging server, yours</a:t>
+            </a:r>
+          </a:p>
+          <a:p>
+            <a:r>
+              <a:t>No per-message fee, ever</a:t>
+            </a:r>
+          </a:p>
+          <a:p>
+            <a:r>
+              <a:t>No template approval, send immediately</a:t>
+            </a:r>
+          </a:p>
+          <a:p>
+            <a:r>
+              <a:t>≈ ₹500/month server, billed by your host</a:t>
+            </a:r>
+          </a:p>
+          <a:p>
+            <a:r>
+              <a:t>Delivery not guaranteed; dedicated number required</a:t>
+            </a:r>
+          </a:p>
+          <a:p>
+            <a:r>
+              <a:t>Both are one-time. Both include deployment, configuration, documentation,</a:t>
+            </a:r>
+          </a:p>
+          <a:p>
+            <a:r>
+              <a:t>handover and the source code in a repository you own. Over three years at</a:t>
+            </a:r>
+          </a:p>
+          <a:p>
+            <a:r>
+              <a:t>twelve campaigns a year, the private gateway costs ₹53,000 against</a:t>
+            </a:r>
+          </a:p>
+          <a:p>
+            <a:r>
+              <a:t>₹3,57,048 for the cheapest subscription platform.</a:t>
+            </a:r>
+          </a:p>
+          <a:p>
+            <a:r>
+              <a:t>Setups Works</a:t>
+            </a:r>
+          </a:p>
+        </p:txBody>
+      </p:sp>
+      <p:sp>
+        <p:nvSpPr>
+          <p:cNvPr id="4" name="Slide Number Placeholder 3"/>
+          <p:cNvSpPr>
+            <a:spLocks noGrp="1"/>
+          </p:cNvSpPr>
+          <p:nvPr>
+            <p:ph type="sldNum" idx="5" sz="quarter"/>
+          </p:nvPr>
+        </p:nvSpPr>
+        <p:spPr/>
+      </p:sp>
+    </p:spTree>
+  </p:cSld>
+  <p:clrMapOvr>
+    <a:masterClrMapping/>
+  </p:clrMapOvr>
+</p:notes>
+</file>
+
+<file path=ppt/notesSlides/notesSlide39.xml><?xml version="1.0" encoding="utf-8"?>
+<p:notes xmlns:a="http://schemas.openxmlformats.org/drawingml/2006/main" xmlns:p="http://schemas.openxmlformats.org/presentationml/2006/main" xmlns:r="http://schemas.openxmlformats.org/officeDocument/2006/relationships">
+  <p:cSld>
+    <p:spTree>
+      <p:nvGrpSpPr>
+        <p:cNvPr id="1" name=""/>
+        <p:cNvGrpSpPr/>
+        <p:nvPr/>
+      </p:nvGrpSpPr>
+      <p:grpSpPr>
+        <a:xfrm>
+          <a:off x="0" y="0"/>
+          <a:ext cx="0" cy="0"/>
+          <a:chOff x="0" y="0"/>
+          <a:chExt cx="0" cy="0"/>
+        </a:xfrm>
+      </p:grpSpPr>
+      <p:sp>
+        <p:nvSpPr>
+          <p:cNvPr id="2" name="Slide Image Placeholder 1"/>
+          <p:cNvSpPr>
+            <a:spLocks noGrp="1"/>
+          </p:cNvSpPr>
+          <p:nvPr>
+            <p:ph type="sldImg" idx="2"/>
+          </p:nvPr>
+        </p:nvSpPr>
+        <p:spPr/>
+      </p:sp>
+      <p:sp>
+        <p:nvSpPr>
+          <p:cNvPr id="3" name="Notes Placeholder 2"/>
+          <p:cNvSpPr>
+            <a:spLocks noGrp="1"/>
+          </p:cNvSpPr>
+          <p:nvPr>
+            <p:ph type="body" idx="3" sz="quarter"/>
+          </p:nvPr>
+        </p:nvSpPr>
+        <p:spPr/>
+        <p:txBody>
+          <a:bodyPr/>
+          <a:lstStyle/>
+          <a:p>
+            <a:r>
+              <a:t>Complete feature list · 1 of 2</a:t>
+            </a:r>
+          </a:p>
+          <a:p>
+            <a:r>
+              <a:t>Everything included, analytics</a:t>
+            </a:r>
+          </a:p>
+          <a:p>
+            <a:r>
+              <a:t>Revenue</a:t>
+            </a:r>
+          </a:p>
+          <a:p>
+            <a:r>
+              <a:t>Net and gross revenue · orders · average order value · units · discounts · shipping · tax · refunds · items per order · revenue per customer · cancellation rate · period-on-period comparison · day, week and month views · sparkline trends · generated findings ranked by urgency</a:t>
+            </a:r>
+          </a:p>
+          <a:p>
+            <a:r>
+              <a:t>Customers</a:t>
+            </a:r>
+          </a:p>
+          <a:p>
+            <a:r>
+              <a:t>RFM scoring · ten segments · five value tiers · predicted lifetime value · churn risk · revenue deciles · Pareto curve · Gini coefficient · recency-frequency plot · top-customer spotlight · high value, low value, at risk and rising cohorts · full ledger with expandable orders</a:t>
+            </a:r>
+          </a:p>
+          <a:p>
+            <a:r>
+              <a:t>Acquisition</a:t>
+            </a:r>
+          </a:p>
+          <a:p>
+            <a:r>
+              <a:t>New versus returning revenue · full customer tables · channel attribution · first-time buyer analysis by channel · device breakdown · pages per session · time to second order with quartiles · monthly cohort retention · cumulative lifetime value curve · attribution coverage</a:t>
+            </a:r>
+          </a:p>
+          <a:p>
+            <a:r>
+              <a:t>Products</a:t>
+            </a:r>
+          </a:p>
+          <a:p>
+            <a:r>
+              <a:t>ABC classification · Pareto concentration · revenue, units, orders and customers per product · price and velocity · refund rate per product · average rating · market-basket affinity by lift · category mix · best sellers by value and volume · slow movers · never-sold items</a:t>
+            </a:r>
+          </a:p>
+          <a:p>
+            <a:r>
+              <a:t>Inventory</a:t>
+            </a:r>
+          </a:p>
+          <a:p>
+            <a:r>
+              <a:t>Days of cover · reorder points from your lead time · suggested order quantities · out of stock, critical, low, healthy and overstocked states · revenue at risk · capital tied up · restock planner · draft purchase order export</a:t>
+            </a:r>
+          </a:p>
+          <a:p>
+            <a:r>
+              <a:t>Operations &amp; forecast</a:t>
+            </a:r>
+          </a:p>
+          <a:p>
+            <a:r>
+              <a:t>Full order register · status mix · basket-size distribution · payment method performance · day-by-hour trading heatmap · weekday performance · fulfilment timing · daily revenue projection · 95% confidence band · weekday seasonality · geography by state, city and region</a:t>
             </a:r>
           </a:p>
           <a:p>
@@ -6039,7 +6189,7 @@
           </a:p>
           <a:p>
             <a:r>
-              <a:t>15</a:t>
+              <a:t>Features</a:t>
             </a:r>
           </a:p>
         </p:txBody>
@@ -6210,6 +6360,851 @@
           <a:p>
             <a:r>
               <a:t>Revenue</a:t>
+            </a:r>
+          </a:p>
+        </p:txBody>
+      </p:sp>
+      <p:sp>
+        <p:nvSpPr>
+          <p:cNvPr id="4" name="Slide Number Placeholder 3"/>
+          <p:cNvSpPr>
+            <a:spLocks noGrp="1"/>
+          </p:cNvSpPr>
+          <p:nvPr>
+            <p:ph type="sldNum" idx="5" sz="quarter"/>
+          </p:nvPr>
+        </p:nvSpPr>
+        <p:spPr/>
+      </p:sp>
+    </p:spTree>
+  </p:cSld>
+  <p:clrMapOvr>
+    <a:masterClrMapping/>
+  </p:clrMapOvr>
+</p:notes>
+</file>
+
+<file path=ppt/notesSlides/notesSlide40.xml><?xml version="1.0" encoding="utf-8"?>
+<p:notes xmlns:a="http://schemas.openxmlformats.org/drawingml/2006/main" xmlns:p="http://schemas.openxmlformats.org/presentationml/2006/main" xmlns:r="http://schemas.openxmlformats.org/officeDocument/2006/relationships">
+  <p:cSld>
+    <p:spTree>
+      <p:nvGrpSpPr>
+        <p:cNvPr id="1" name=""/>
+        <p:cNvGrpSpPr/>
+        <p:nvPr/>
+      </p:nvGrpSpPr>
+      <p:grpSpPr>
+        <a:xfrm>
+          <a:off x="0" y="0"/>
+          <a:ext cx="0" cy="0"/>
+          <a:chOff x="0" y="0"/>
+          <a:chExt cx="0" cy="0"/>
+        </a:xfrm>
+      </p:grpSpPr>
+      <p:sp>
+        <p:nvSpPr>
+          <p:cNvPr id="2" name="Slide Image Placeholder 1"/>
+          <p:cNvSpPr>
+            <a:spLocks noGrp="1"/>
+          </p:cNvSpPr>
+          <p:nvPr>
+            <p:ph type="sldImg" idx="2"/>
+          </p:nvPr>
+        </p:nvSpPr>
+        <p:spPr/>
+      </p:sp>
+      <p:sp>
+        <p:nvSpPr>
+          <p:cNvPr id="3" name="Notes Placeholder 2"/>
+          <p:cNvSpPr>
+            <a:spLocks noGrp="1"/>
+          </p:cNvSpPr>
+          <p:nvPr>
+            <p:ph type="body" idx="3" sz="quarter"/>
+          </p:nvPr>
+        </p:nvSpPr>
+        <p:spPr/>
+        <p:txBody>
+          <a:bodyPr/>
+          <a:lstStyle/>
+          <a:p>
+            <a:r>
+              <a:t>Complete feature list · 2 of 2</a:t>
+            </a:r>
+          </a:p>
+          <a:p>
+            <a:r>
+              <a:t>Everything included, messaging and platform</a:t>
+            </a:r>
+          </a:p>
+          <a:p>
+            <a:r>
+              <a:t>Campaigns</a:t>
+            </a:r>
+          </a:p>
+          <a:p>
+            <a:r>
+              <a:t>Audience builder with live reach · six goal presets · filters on segment, tier, recency, spend, orders, churn risk, country, account type, product bought and contactability · revenue and predicted value at stake · CSV export for email and ads platforms · campaign performance from UTM tags · coupon return on discount</a:t>
+            </a:r>
+          </a:p>
+          <a:p>
+            <a:r>
+              <a:t>WhatsApp</a:t>
+            </a:r>
+          </a:p>
+          <a:p>
+            <a:r>
+              <a:t>Text, image and video · nine templates · ten personalisation variables · per-customer product photos · catalogue product picker · coupon creation and attachment · dry run · test send · typed confirmation · opt-out list · paced sending with jitter · resumable jobs · automatic recovery · live progress and stop control</a:t>
+            </a:r>
+          </a:p>
+          <a:p>
+            <a:r>
+              <a:t>Inbox</a:t>
+            </a:r>
+          </a:p>
+          <a:p>
+            <a:r>
+              <a:t>Conversations matched to customers · order count and lifetime spend beside each · link to full profile · live reply polling · text, media and product replies · start a conversation from a number · unread counts · search across names and numbers · opt-out honoured</a:t>
+            </a:r>
+          </a:p>
+          <a:p>
+            <a:r>
+              <a:t>Reports</a:t>
+            </a:r>
+          </a:p>
+          <a:p>
+            <a:r>
+              <a:t>Ten report types · Excel with formatted sheets, filters and currency formats · PDF with cover, KPIs and findings · CSV for pipelines · board pack, CRM upload, merchandising and finance presets · written report view · exports match the on-screen date range and are never truncated</a:t>
+            </a:r>
+          </a:p>
+          <a:p>
+            <a:r>
+              <a:t>Platform</a:t>
+            </a:r>
+          </a:p>
+          <a:p>
+            <a:r>
+              <a:t>Multiple stores with instant switching · command palette across customers, products and orders · keyboard navigation throughout · light and dark themes · persisted date ranges · sortable, searchable, expandable tables · optional password protection · honest empty states · partial-data warnings surfaced</a:t>
+            </a:r>
+          </a:p>
+          <a:p>
+            <a:r>
+              <a:t>Security</a:t>
+            </a:r>
+          </a:p>
+          <a:p>
+            <a:r>
+              <a:t>Approval inside your own WordPress admin · no credential ever typed into a form · verified before saving · keys shown masked · phone numbers never sent to the browser · opt-outs enforced on the server · one-click disconnect wipes everything cached</a:t>
+            </a:r>
+          </a:p>
+          <a:p>
+            <a:r>
+              <a:t>PulseCommerce</a:t>
+            </a:r>
+          </a:p>
+          <a:p>
+            <a:r>
+              <a:t>Features</a:t>
+            </a:r>
+          </a:p>
+        </p:txBody>
+      </p:sp>
+      <p:sp>
+        <p:nvSpPr>
+          <p:cNvPr id="4" name="Slide Number Placeholder 3"/>
+          <p:cNvSpPr>
+            <a:spLocks noGrp="1"/>
+          </p:cNvSpPr>
+          <p:nvPr>
+            <p:ph type="sldNum" idx="5" sz="quarter"/>
+          </p:nvPr>
+        </p:nvSpPr>
+        <p:spPr/>
+      </p:sp>
+    </p:spTree>
+  </p:cSld>
+  <p:clrMapOvr>
+    <a:masterClrMapping/>
+  </p:clrMapOvr>
+</p:notes>
+</file>
+
+<file path=ppt/notesSlides/notesSlide41.xml><?xml version="1.0" encoding="utf-8"?>
+<p:notes xmlns:a="http://schemas.openxmlformats.org/drawingml/2006/main" xmlns:p="http://schemas.openxmlformats.org/presentationml/2006/main" xmlns:r="http://schemas.openxmlformats.org/officeDocument/2006/relationships">
+  <p:cSld>
+    <p:spTree>
+      <p:nvGrpSpPr>
+        <p:cNvPr id="1" name=""/>
+        <p:cNvGrpSpPr/>
+        <p:nvPr/>
+      </p:nvGrpSpPr>
+      <p:grpSpPr>
+        <a:xfrm>
+          <a:off x="0" y="0"/>
+          <a:ext cx="0" cy="0"/>
+          <a:chOff x="0" y="0"/>
+          <a:chExt cx="0" cy="0"/>
+        </a:xfrm>
+      </p:grpSpPr>
+      <p:sp>
+        <p:nvSpPr>
+          <p:cNvPr id="2" name="Slide Image Placeholder 1"/>
+          <p:cNvSpPr>
+            <a:spLocks noGrp="1"/>
+          </p:cNvSpPr>
+          <p:nvPr>
+            <p:ph type="sldImg" idx="2"/>
+          </p:nvPr>
+        </p:nvSpPr>
+        <p:spPr/>
+      </p:sp>
+      <p:sp>
+        <p:nvSpPr>
+          <p:cNvPr id="3" name="Notes Placeholder 2"/>
+          <p:cNvSpPr>
+            <a:spLocks noGrp="1"/>
+          </p:cNvSpPr>
+          <p:nvPr>
+            <p:ph type="body" idx="3" sz="quarter"/>
+          </p:nvPr>
+        </p:nvSpPr>
+        <p:spPr/>
+        <p:txBody>
+          <a:bodyPr/>
+          <a:lstStyle/>
+          <a:p>
+            <a:r>
+              <a:t>Terms &amp; conditions · 1 of 2</a:t>
+            </a:r>
+          </a:p>
+          <a:p>
+            <a:r>
+              <a:t>What the figures mean</a:t>
+            </a:r>
+          </a:p>
+          <a:p>
+            <a:r>
+              <a:t>Measurement window</a:t>
+            </a:r>
+          </a:p>
+          <a:p>
+            <a:r>
+              <a:t>All store figures were computed from</a:t>
+            </a:r>
+          </a:p>
+          <a:p>
+            <a:r>
+              <a:t>naturesjoystore.com covering 1 August 2025 to 31 July 2026, across 20,444 orders</a:t>
+            </a:r>
+          </a:p>
+          <a:p>
+            <a:r>
+              <a:t>retrieved through the WooCommerce REST API. Figures change as the store trades and</a:t>
+            </a:r>
+          </a:p>
+          <a:p>
+            <a:r>
+              <a:t>should be re-run before being relied upon.</a:t>
+            </a:r>
+          </a:p>
+          <a:p>
+            <a:r>
+              <a:t>How revenue is counted</a:t>
+            </a:r>
+          </a:p>
+          <a:p>
+            <a:r>
+              <a:t>Net revenue is order total less tax, shipping</a:t>
+            </a:r>
+          </a:p>
+          <a:p>
+            <a:r>
+              <a:t>and refunds, counting only orders in completed, processing or on-hold status. Cancelled,</a:t>
+            </a:r>
+          </a:p>
+          <a:p>
+            <a:r>
+              <a:t>failed and pending orders are excluded from revenue but included in cancellation rates.</a:t>
+            </a:r>
+          </a:p>
+          <a:p>
+            <a:r>
+              <a:t>This may differ from figures shown elsewhere in WooCommerce, which counts differently.</a:t>
+            </a:r>
+          </a:p>
+          <a:p>
+            <a:r>
+              <a:t>How customers are counted</a:t>
+            </a:r>
+          </a:p>
+          <a:p>
+            <a:r>
+              <a:t>Guest checkouts carry no WooCommerce customer</a:t>
+            </a:r>
+          </a:p>
+          <a:p>
+            <a:r>
+              <a:t>ID, so buyers are identified by billing email address. One person ordering under two email</a:t>
+            </a:r>
+          </a:p>
+          <a:p>
+            <a:r>
+              <a:t>addresses counts as two customers. Customer counts and repeat rates are affected accordingly.</a:t>
+            </a:r>
+          </a:p>
+          <a:p>
+            <a:r>
+              <a:t>Projections and illustrations</a:t>
+            </a:r>
+          </a:p>
+          <a:p>
+            <a:r>
+              <a:t>Win-back revenue, campaign returns, break-even points and forecasts are</a:t>
+            </a:r>
+          </a:p>
+          <a:p>
+            <a:r>
+              <a:t>illustrations based on stated assumptions. They are not forecasts, guarantees, warranties</a:t>
+            </a:r>
+          </a:p>
+          <a:p>
+            <a:r>
+              <a:t>or commitments of any kind. Actual results will differ, potentially materially.</a:t>
+            </a:r>
+          </a:p>
+          <a:p>
+            <a:r>
+              <a:t>Statistical limits</a:t>
+            </a:r>
+          </a:p>
+          <a:p>
+            <a:r>
+              <a:t>Predicted lifetime value and churn risk are</a:t>
+            </a:r>
+          </a:p>
+          <a:p>
+            <a:r>
+              <a:t>estimates derived from observed purchase behaviour. Forecasts use a least-squares trend with</a:t>
+            </a:r>
+          </a:p>
+          <a:p>
+            <a:r>
+              <a:t>day-of-week seasonality and know nothing of planned promotions, stock availability, price</a:t>
+            </a:r>
+          </a:p>
+          <a:p>
+            <a:r>
+              <a:t>changes or seasonality outside the period analysed.</a:t>
+            </a:r>
+          </a:p>
+          <a:p>
+            <a:r>
+              <a:t>Third-party pricing</a:t>
+            </a:r>
+          </a:p>
+          <a:p>
+            <a:r>
+              <a:t>WhatsApp Cloud API rates are set by Meta, vary by</a:t>
+            </a:r>
+          </a:p>
+          <a:p>
+            <a:r>
+              <a:t>country and message category, and change without notice. The rates shown are illustrative</a:t>
+            </a:r>
+          </a:p>
+          <a:p>
+            <a:r>
+              <a:t>ranges, not quotations. Confirm current pricing with Meta before making a decision on that basis.</a:t>
+            </a:r>
+          </a:p>
+          <a:p>
+            <a:r>
+              <a:t>Costs not included</a:t>
+            </a:r>
+          </a:p>
+          <a:p>
+            <a:r>
+              <a:t>Server hosting for the WhatsApp gateway, estimated</a:t>
+            </a:r>
+          </a:p>
+          <a:p>
+            <a:r>
+              <a:t>at approximately ₹500 per month, is billed by your hosting provider and is not included in the</a:t>
+            </a:r>
+          </a:p>
+          <a:p>
+            <a:r>
+              <a:t>quoted price. A dedicated phone number for WhatsApp sending is also not included. Domain,</a:t>
+            </a:r>
+          </a:p>
+          <a:p>
+            <a:r>
+              <a:t>SSL and WooCommerce hosting remain your existing arrangements.</a:t>
+            </a:r>
+          </a:p>
+          <a:p>
+            <a:r>
+              <a:t>Inventory figures</a:t>
+            </a:r>
+          </a:p>
+          <a:p>
+            <a:r>
+              <a:t>Days of cover and revenue at risk are calculated from observed sales velocity</a:t>
+            </a:r>
+          </a:p>
+          <a:p>
+            <a:r>
+              <a:t>and current stock levels where WooCommerce tracks them. Products without stock management</a:t>
+            </a:r>
+          </a:p>
+          <a:p>
+            <a:r>
+              <a:t>enabled cannot be planned for.</a:t>
+            </a:r>
+          </a:p>
+          <a:p>
+            <a:r>
+              <a:t>Setups Works · setups.works</a:t>
+            </a:r>
+          </a:p>
+          <a:p>
+            <a:r>
+              <a:t>Terms 1 / 2</a:t>
+            </a:r>
+          </a:p>
+        </p:txBody>
+      </p:sp>
+      <p:sp>
+        <p:nvSpPr>
+          <p:cNvPr id="4" name="Slide Number Placeholder 3"/>
+          <p:cNvSpPr>
+            <a:spLocks noGrp="1"/>
+          </p:cNvSpPr>
+          <p:nvPr>
+            <p:ph type="sldNum" idx="5" sz="quarter"/>
+          </p:nvPr>
+        </p:nvSpPr>
+        <p:spPr/>
+      </p:sp>
+    </p:spTree>
+  </p:cSld>
+  <p:clrMapOvr>
+    <a:masterClrMapping/>
+  </p:clrMapOvr>
+</p:notes>
+</file>
+
+<file path=ppt/notesSlides/notesSlide42.xml><?xml version="1.0" encoding="utf-8"?>
+<p:notes xmlns:a="http://schemas.openxmlformats.org/drawingml/2006/main" xmlns:p="http://schemas.openxmlformats.org/presentationml/2006/main" xmlns:r="http://schemas.openxmlformats.org/officeDocument/2006/relationships">
+  <p:cSld>
+    <p:spTree>
+      <p:nvGrpSpPr>
+        <p:cNvPr id="1" name=""/>
+        <p:cNvGrpSpPr/>
+        <p:nvPr/>
+      </p:nvGrpSpPr>
+      <p:grpSpPr>
+        <a:xfrm>
+          <a:off x="0" y="0"/>
+          <a:ext cx="0" cy="0"/>
+          <a:chOff x="0" y="0"/>
+          <a:chExt cx="0" cy="0"/>
+        </a:xfrm>
+      </p:grpSpPr>
+      <p:sp>
+        <p:nvSpPr>
+          <p:cNvPr id="2" name="Slide Image Placeholder 1"/>
+          <p:cNvSpPr>
+            <a:spLocks noGrp="1"/>
+          </p:cNvSpPr>
+          <p:nvPr>
+            <p:ph type="sldImg" idx="2"/>
+          </p:nvPr>
+        </p:nvSpPr>
+        <p:spPr/>
+      </p:sp>
+      <p:sp>
+        <p:nvSpPr>
+          <p:cNvPr id="3" name="Notes Placeholder 2"/>
+          <p:cNvSpPr>
+            <a:spLocks noGrp="1"/>
+          </p:cNvSpPr>
+          <p:nvPr>
+            <p:ph type="body" idx="3" sz="quarter"/>
+          </p:nvPr>
+        </p:nvSpPr>
+        <p:spPr/>
+        <p:txBody>
+          <a:bodyPr/>
+          <a:lstStyle/>
+          <a:p>
+            <a:r>
+              <a:t>Terms &amp; conditions · 2 of 2</a:t>
+            </a:r>
+          </a:p>
+          <a:p>
+            <a:r>
+              <a:t>Delivery, risk and the quote</a:t>
+            </a:r>
+          </a:p>
+          <a:p>
+            <a:r>
+              <a:t>WhatsApp delivery is not guaranteed</a:t>
+            </a:r>
+          </a:p>
+          <a:p>
+            <a:r>
+              <a:t>Messaging uses a self-hosted gateway connecting</a:t>
+            </a:r>
+          </a:p>
+          <a:p>
+            <a:r>
+              <a:t>through unofficial, reverse-engineered clients rather than Meta's official WhatsApp Business</a:t>
+            </a:r>
+          </a:p>
+          <a:p>
+            <a:r>
+              <a:t>API. Message delivery is not guaranteed. WhatsApp may, at its sole discretion and without</a:t>
+            </a:r>
+          </a:p>
+          <a:p>
+            <a:r>
+              <a:t>notice, restrict, suspend or permanently ban any number used for automated messaging. No</a:t>
+            </a:r>
+          </a:p>
+          <a:p>
+            <a:r>
+              <a:t>appeal route exists through this software or through Setups Works.</a:t>
+            </a:r>
+          </a:p>
+          <a:p>
+            <a:r>
+              <a:t>Use a dedicated number</a:t>
+            </a:r>
+          </a:p>
+          <a:p>
+            <a:r>
+              <a:t>A number reserved for this purpose must be used,</a:t>
+            </a:r>
+          </a:p>
+          <a:p>
+            <a:r>
+              <a:t>never the primary business line. Setups Works accepts no liability for the restriction, loss</a:t>
+            </a:r>
+          </a:p>
+          <a:p>
+            <a:r>
+              <a:t>or suspension of any number, for messages that fail to deliver, or for consequential business</a:t>
+            </a:r>
+          </a:p>
+          <a:p>
+            <a:r>
+              <a:t>loss arising from either.</a:t>
+            </a:r>
+          </a:p>
+          <a:p>
+            <a:r>
+              <a:t>Your responsibility when messaging</a:t>
+            </a:r>
+          </a:p>
+          <a:p>
+            <a:r>
+              <a:t>You are responsible for ensuring messages sent</a:t>
+            </a:r>
+          </a:p>
+          <a:p>
+            <a:r>
+              <a:t>comply with applicable law, including consent, data protection and unsolicited-communication</a:t>
+            </a:r>
+          </a:p>
+          <a:p>
+            <a:r>
+              <a:t>rules in the recipient's jurisdiction, and with WhatsApp's own terms. The opt-out list is</a:t>
+            </a:r>
+          </a:p>
+          <a:p>
+            <a:r>
+              <a:t>provided as a tool; honouring requests to stop remains your obligation.</a:t>
+            </a:r>
+          </a:p>
+          <a:p>
+            <a:r>
+              <a:t>Features outside this route</a:t>
+            </a:r>
+          </a:p>
+          <a:p>
+            <a:r>
+              <a:t>Tappable buttons and product cards are features of Meta's official API and</a:t>
+            </a:r>
+          </a:p>
+          <a:p>
+            <a:r>
+              <a:t>cannot be delivered by a self-hosted gateway. They are excluded from this scope.</a:t>
+            </a:r>
+          </a:p>
+          <a:p>
+            <a:r>
+              <a:t>Your data</a:t>
+            </a:r>
+          </a:p>
+          <a:p>
+            <a:r>
+              <a:t>All store and customer data remains the property</a:t>
+            </a:r>
+          </a:p>
+          <a:p>
+            <a:r>
+              <a:t>of Nature's Joy and stays on infrastructure you control. No data is transmitted to Setups</a:t>
+            </a:r>
+          </a:p>
+          <a:p>
+            <a:r>
+              <a:t>Works or to any third-party analytics or messaging service. Store access is read-only with a</a:t>
+            </a:r>
+          </a:p>
+          <a:p>
+            <a:r>
+              <a:t>single exception: creating the discount coupons you request. Access can be revoked at any time</a:t>
+            </a:r>
+          </a:p>
+          <a:p>
+            <a:r>
+              <a:t>from WordPress without notice to us.</a:t>
+            </a:r>
+          </a:p>
+          <a:p>
+            <a:r>
+              <a:t>Scope and ownership</a:t>
+            </a:r>
+          </a:p>
+          <a:p>
+            <a:r>
+              <a:t>The quoted fee, ₹25,000 or ₹35,000 depending on the messaging route chosen, covers the build, deployment,</a:t>
+            </a:r>
+          </a:p>
+          <a:p>
+            <a:r>
+              <a:t>configuration, documentation and handover of the thirteen modules described in this document.</a:t>
+            </a:r>
+          </a:p>
+          <a:p>
+            <a:r>
+              <a:t>Source code is delivered to a repository owned by Nature's Joy. Work outside this scope,</a:t>
+            </a:r>
+          </a:p>
+          <a:p>
+            <a:r>
+              <a:t>including additional modules, custom metrics, integrations or ongoing support, is quoted</a:t>
+            </a:r>
+          </a:p>
+          <a:p>
+            <a:r>
+              <a:t>separately.</a:t>
+            </a:r>
+          </a:p>
+          <a:p>
+            <a:r>
+              <a:t>Validity and payment</a:t>
+            </a:r>
+          </a:p>
+          <a:p>
+            <a:r>
+              <a:t>This quotation is valid for 30 days from the date</a:t>
+            </a:r>
+          </a:p>
+          <a:p>
+            <a:r>
+              <a:t>of issue. Payment terms to be agreed in writing before work commences.</a:t>
+            </a:r>
+          </a:p>
+          <a:p>
+            <a:r>
+              <a:t>Third-party software</a:t>
+            </a:r>
+          </a:p>
+          <a:p>
+            <a:r>
+              <a:t>The WhatsApp gateway is independent open-source software, provided under its</a:t>
+            </a:r>
+          </a:p>
+          <a:p>
+            <a:r>
+              <a:t>own licence and maintained by its own authors. Setups Works does not control its development,</a:t>
+            </a:r>
+          </a:p>
+          <a:p>
+            <a:r>
+              <a:t>availability or continued compatibility with WhatsApp.</a:t>
+            </a:r>
+          </a:p>
+          <a:p>
+            <a:r>
+              <a:t>Setups Works · setups.works</a:t>
+            </a:r>
+          </a:p>
+          <a:p>
+            <a:r>
+              <a:t>Terms 2 / 2</a:t>
+            </a:r>
+          </a:p>
+        </p:txBody>
+      </p:sp>
+      <p:sp>
+        <p:nvSpPr>
+          <p:cNvPr id="4" name="Slide Number Placeholder 3"/>
+          <p:cNvSpPr>
+            <a:spLocks noGrp="1"/>
+          </p:cNvSpPr>
+          <p:nvPr>
+            <p:ph type="sldNum" idx="5" sz="quarter"/>
+          </p:nvPr>
+        </p:nvSpPr>
+        <p:spPr/>
+      </p:sp>
+    </p:spTree>
+  </p:cSld>
+  <p:clrMapOvr>
+    <a:masterClrMapping/>
+  </p:clrMapOvr>
+</p:notes>
+</file>
+
+<file path=ppt/notesSlides/notesSlide43.xml><?xml version="1.0" encoding="utf-8"?>
+<p:notes xmlns:a="http://schemas.openxmlformats.org/drawingml/2006/main" xmlns:p="http://schemas.openxmlformats.org/presentationml/2006/main" xmlns:r="http://schemas.openxmlformats.org/officeDocument/2006/relationships">
+  <p:cSld>
+    <p:spTree>
+      <p:nvGrpSpPr>
+        <p:cNvPr id="1" name=""/>
+        <p:cNvGrpSpPr/>
+        <p:nvPr/>
+      </p:nvGrpSpPr>
+      <p:grpSpPr>
+        <a:xfrm>
+          <a:off x="0" y="0"/>
+          <a:ext cx="0" cy="0"/>
+          <a:chOff x="0" y="0"/>
+          <a:chExt cx="0" cy="0"/>
+        </a:xfrm>
+      </p:grpSpPr>
+      <p:sp>
+        <p:nvSpPr>
+          <p:cNvPr id="2" name="Slide Image Placeholder 1"/>
+          <p:cNvSpPr>
+            <a:spLocks noGrp="1"/>
+          </p:cNvSpPr>
+          <p:nvPr>
+            <p:ph type="sldImg" idx="2"/>
+          </p:nvPr>
+        </p:nvSpPr>
+        <p:spPr/>
+      </p:sp>
+      <p:sp>
+        <p:nvSpPr>
+          <p:cNvPr id="3" name="Notes Placeholder 2"/>
+          <p:cNvSpPr>
+            <a:spLocks noGrp="1"/>
+          </p:cNvSpPr>
+          <p:nvPr>
+            <p:ph type="body" idx="3" sz="quarter"/>
+          </p:nvPr>
+        </p:nvSpPr>
+        <p:spPr/>
+        <p:txBody>
+          <a:bodyPr/>
+          <a:lstStyle/>
+          <a:p>
+            <a:r>
+              <a:t>Next steps</a:t>
+            </a:r>
+          </a:p>
+          <a:p>
+            <a:r>
+              <a:t>How this proceeds</a:t>
+            </a:r>
+          </a:p>
+          <a:p>
+            <a:r>
+              <a:t>Step 1</a:t>
+            </a:r>
+          </a:p>
+          <a:p>
+            <a:r>
+              <a:t>Confirm scope</a:t>
+            </a:r>
+          </a:p>
+          <a:p>
+            <a:r>
+              <a:t>Agree which modules matter most and confirm the commercial terms.</a:t>
+            </a:r>
+          </a:p>
+          <a:p>
+            <a:r>
+              <a:t>Step 2</a:t>
+            </a:r>
+          </a:p>
+          <a:p>
+            <a:r>
+              <a:t>Walkthrough</a:t>
+            </a:r>
+          </a:p>
+          <a:p>
+            <a:r>
+              <a:t>See the platform running against your own data, before rollout.</a:t>
+            </a:r>
+          </a:p>
+          <a:p>
+            <a:r>
+              <a:t>Step 3</a:t>
+            </a:r>
+          </a:p>
+          <a:p>
+            <a:r>
+              <a:t>Deploy</a:t>
+            </a:r>
+          </a:p>
+          <a:p>
+            <a:r>
+              <a:t>Platform and gateway set up on your infrastructure and verified.</a:t>
+            </a:r>
+          </a:p>
+          <a:p>
+            <a:r>
+              <a:t>Step 4</a:t>
+            </a:r>
+          </a:p>
+          <a:p>
+            <a:r>
+              <a:t>Handover</a:t>
+            </a:r>
+          </a:p>
+          <a:p>
+            <a:r>
+              <a:t>Training, documentation, and the code in your own repository.</a:t>
+            </a:r>
+          </a:p>
+          <a:p>
+            <a:r>
+              <a:t>Nitheesh Rajendran</a:t>
+            </a:r>
+          </a:p>
+          <a:p>
+            <a:r>
+              <a:t>Founder &amp; Developer · Setups Works</a:t>
+            </a:r>
+          </a:p>
+          <a:p>
+            <a:r>
+              <a:t>setups.works · linkedin.com/in/nitheeshdr</a:t>
+            </a:r>
+          </a:p>
+          <a:p>
+            <a:r>
+              <a:t>PulseCommerce</a:t>
+            </a:r>
+          </a:p>
+          <a:p>
+            <a:r>
+              <a:t>15</a:t>
             </a:r>
           </a:p>
         </p:txBody>
@@ -11549,6 +12544,48 @@
 </p:sld>
 </file>
 
+<file path=ppt/slides/slide39.xml><?xml version="1.0" encoding="utf-8"?>
+<p:sld xmlns:a="http://schemas.openxmlformats.org/drawingml/2006/main" xmlns:p="http://schemas.openxmlformats.org/presentationml/2006/main" xmlns:r="http://schemas.openxmlformats.org/officeDocument/2006/relationships">
+  <p:cSld>
+    <p:spTree>
+      <p:nvGrpSpPr>
+        <p:cNvPr id="1" name=""/>
+        <p:cNvGrpSpPr/>
+        <p:nvPr/>
+      </p:nvGrpSpPr>
+      <p:grpSpPr/>
+      <p:pic>
+        <p:nvPicPr>
+          <p:cNvPr id="2" name="Picture 1" descr="s-39.png"/>
+          <p:cNvPicPr>
+            <a:picLocks noChangeAspect="1"/>
+          </p:cNvPicPr>
+          <p:nvPr/>
+        </p:nvPicPr>
+        <p:blipFill>
+          <a:blip r:embed="rId2"/>
+          <a:stretch>
+            <a:fillRect/>
+          </a:stretch>
+        </p:blipFill>
+        <p:spPr>
+          <a:xfrm>
+            <a:off x="0" y="0"/>
+            <a:ext cx="12191695" cy="6858000"/>
+          </a:xfrm>
+          <a:prstGeom prst="rect">
+            <a:avLst/>
+          </a:prstGeom>
+        </p:spPr>
+      </p:pic>
+    </p:spTree>
+  </p:cSld>
+  <p:clrMapOvr>
+    <a:masterClrMapping/>
+  </p:clrMapOvr>
+</p:sld>
+</file>
+
 <file path=ppt/slides/slide4.xml><?xml version="1.0" encoding="utf-8"?>
 <p:sld xmlns:a="http://schemas.openxmlformats.org/drawingml/2006/main" xmlns:p="http://schemas.openxmlformats.org/presentationml/2006/main" xmlns:r="http://schemas.openxmlformats.org/officeDocument/2006/relationships">
   <p:cSld>
@@ -11562,6 +12599,174 @@
       <p:pic>
         <p:nvPicPr>
           <p:cNvPr id="2" name="Picture 1" descr="s-04.png"/>
+          <p:cNvPicPr>
+            <a:picLocks noChangeAspect="1"/>
+          </p:cNvPicPr>
+          <p:nvPr/>
+        </p:nvPicPr>
+        <p:blipFill>
+          <a:blip r:embed="rId2"/>
+          <a:stretch>
+            <a:fillRect/>
+          </a:stretch>
+        </p:blipFill>
+        <p:spPr>
+          <a:xfrm>
+            <a:off x="0" y="0"/>
+            <a:ext cx="12191695" cy="6858000"/>
+          </a:xfrm>
+          <a:prstGeom prst="rect">
+            <a:avLst/>
+          </a:prstGeom>
+        </p:spPr>
+      </p:pic>
+    </p:spTree>
+  </p:cSld>
+  <p:clrMapOvr>
+    <a:masterClrMapping/>
+  </p:clrMapOvr>
+</p:sld>
+</file>
+
+<file path=ppt/slides/slide40.xml><?xml version="1.0" encoding="utf-8"?>
+<p:sld xmlns:a="http://schemas.openxmlformats.org/drawingml/2006/main" xmlns:p="http://schemas.openxmlformats.org/presentationml/2006/main" xmlns:r="http://schemas.openxmlformats.org/officeDocument/2006/relationships">
+  <p:cSld>
+    <p:spTree>
+      <p:nvGrpSpPr>
+        <p:cNvPr id="1" name=""/>
+        <p:cNvGrpSpPr/>
+        <p:nvPr/>
+      </p:nvGrpSpPr>
+      <p:grpSpPr/>
+      <p:pic>
+        <p:nvPicPr>
+          <p:cNvPr id="2" name="Picture 1" descr="s-40.png"/>
+          <p:cNvPicPr>
+            <a:picLocks noChangeAspect="1"/>
+          </p:cNvPicPr>
+          <p:nvPr/>
+        </p:nvPicPr>
+        <p:blipFill>
+          <a:blip r:embed="rId2"/>
+          <a:stretch>
+            <a:fillRect/>
+          </a:stretch>
+        </p:blipFill>
+        <p:spPr>
+          <a:xfrm>
+            <a:off x="0" y="0"/>
+            <a:ext cx="12191695" cy="6858000"/>
+          </a:xfrm>
+          <a:prstGeom prst="rect">
+            <a:avLst/>
+          </a:prstGeom>
+        </p:spPr>
+      </p:pic>
+    </p:spTree>
+  </p:cSld>
+  <p:clrMapOvr>
+    <a:masterClrMapping/>
+  </p:clrMapOvr>
+</p:sld>
+</file>
+
+<file path=ppt/slides/slide41.xml><?xml version="1.0" encoding="utf-8"?>
+<p:sld xmlns:a="http://schemas.openxmlformats.org/drawingml/2006/main" xmlns:p="http://schemas.openxmlformats.org/presentationml/2006/main" xmlns:r="http://schemas.openxmlformats.org/officeDocument/2006/relationships">
+  <p:cSld>
+    <p:spTree>
+      <p:nvGrpSpPr>
+        <p:cNvPr id="1" name=""/>
+        <p:cNvGrpSpPr/>
+        <p:nvPr/>
+      </p:nvGrpSpPr>
+      <p:grpSpPr/>
+      <p:pic>
+        <p:nvPicPr>
+          <p:cNvPr id="2" name="Picture 1" descr="s-41.png"/>
+          <p:cNvPicPr>
+            <a:picLocks noChangeAspect="1"/>
+          </p:cNvPicPr>
+          <p:nvPr/>
+        </p:nvPicPr>
+        <p:blipFill>
+          <a:blip r:embed="rId2"/>
+          <a:stretch>
+            <a:fillRect/>
+          </a:stretch>
+        </p:blipFill>
+        <p:spPr>
+          <a:xfrm>
+            <a:off x="0" y="0"/>
+            <a:ext cx="12191695" cy="6858000"/>
+          </a:xfrm>
+          <a:prstGeom prst="rect">
+            <a:avLst/>
+          </a:prstGeom>
+        </p:spPr>
+      </p:pic>
+    </p:spTree>
+  </p:cSld>
+  <p:clrMapOvr>
+    <a:masterClrMapping/>
+  </p:clrMapOvr>
+</p:sld>
+</file>
+
+<file path=ppt/slides/slide42.xml><?xml version="1.0" encoding="utf-8"?>
+<p:sld xmlns:a="http://schemas.openxmlformats.org/drawingml/2006/main" xmlns:p="http://schemas.openxmlformats.org/presentationml/2006/main" xmlns:r="http://schemas.openxmlformats.org/officeDocument/2006/relationships">
+  <p:cSld>
+    <p:spTree>
+      <p:nvGrpSpPr>
+        <p:cNvPr id="1" name=""/>
+        <p:cNvGrpSpPr/>
+        <p:nvPr/>
+      </p:nvGrpSpPr>
+      <p:grpSpPr/>
+      <p:pic>
+        <p:nvPicPr>
+          <p:cNvPr id="2" name="Picture 1" descr="s-42.png"/>
+          <p:cNvPicPr>
+            <a:picLocks noChangeAspect="1"/>
+          </p:cNvPicPr>
+          <p:nvPr/>
+        </p:nvPicPr>
+        <p:blipFill>
+          <a:blip r:embed="rId2"/>
+          <a:stretch>
+            <a:fillRect/>
+          </a:stretch>
+        </p:blipFill>
+        <p:spPr>
+          <a:xfrm>
+            <a:off x="0" y="0"/>
+            <a:ext cx="12191695" cy="6858000"/>
+          </a:xfrm>
+          <a:prstGeom prst="rect">
+            <a:avLst/>
+          </a:prstGeom>
+        </p:spPr>
+      </p:pic>
+    </p:spTree>
+  </p:cSld>
+  <p:clrMapOvr>
+    <a:masterClrMapping/>
+  </p:clrMapOvr>
+</p:sld>
+</file>
+
+<file path=ppt/slides/slide43.xml><?xml version="1.0" encoding="utf-8"?>
+<p:sld xmlns:a="http://schemas.openxmlformats.org/drawingml/2006/main" xmlns:p="http://schemas.openxmlformats.org/presentationml/2006/main" xmlns:r="http://schemas.openxmlformats.org/officeDocument/2006/relationships">
+  <p:cSld>
+    <p:spTree>
+      <p:nvGrpSpPr>
+        <p:cNvPr id="1" name=""/>
+        <p:cNvGrpSpPr/>
+        <p:nvPr/>
+      </p:nvGrpSpPr>
+      <p:grpSpPr/>
+      <p:pic>
+        <p:nvPicPr>
+          <p:cNvPr id="2" name="Picture 1" descr="s-43.png"/>
           <p:cNvPicPr>
             <a:picLocks noChangeAspect="1"/>
           </p:cNvPicPr>

--- a/proposal/PulseCommerce-Presentation-NaturesJoy.pptx
+++ b/proposal/PulseCommerce-Presentation-NaturesJoy.pptx
@@ -564,12 +564,12 @@
           </a:p>
           <a:p>
             <a:r>
-              <a:t>₹25,000</a:t>
-            </a:r>
-          </a:p>
-          <a:p>
-            <a:r>
-              <a:t>One-time, from</a:t>
+              <a:t>₹35,000</a:t>
+            </a:r>
+          </a:p>
+          <a:p>
+            <a:r>
+              <a:t>One-time, private gateway</a:t>
             </a:r>
           </a:p>
           <a:p>
@@ -4754,12 +4754,12 @@
           </a:p>
           <a:p>
             <a:r>
-              <a:t>Twelve campaigns a year to your 11,224 customers, with Meta</a:t>
-            </a:r>
-          </a:p>
-          <a:p>
-            <a:r>
-              <a:t>conversations at ₹0.75.</a:t>
+              <a:t>One campaign a month to your 11,224 customers, with Meta charging</a:t>
+            </a:r>
+          </a:p>
+          <a:p>
+            <a:r>
+              <a:t>approximately ₹10,000 a month for them.</a:t>
             </a:r>
           </a:p>
           <a:p>
@@ -4799,12 +4799,12 @@
           </a:p>
           <a:p>
             <a:r>
-              <a:t>₹3,03,048</a:t>
-            </a:r>
-          </a:p>
-          <a:p>
-            <a:r>
-              <a:t>₹3,57,048</a:t>
+              <a:t>₹3,60,000</a:t>
+            </a:r>
+          </a:p>
+          <a:p>
+            <a:r>
+              <a:t>₹4,14,000</a:t>
             </a:r>
           </a:p>
           <a:p>
@@ -4819,7 +4819,7 @@
           </a:p>
           <a:p>
             <a:r>
-              <a:t>₹3,89,412</a:t>
+              <a:t>₹4,46,364</a:t>
             </a:r>
           </a:p>
           <a:p>
@@ -4834,7 +4834,7 @@
           </a:p>
           <a:p>
             <a:r>
-              <a:t>₹4,03,812</a:t>
+              <a:t>₹4,60,764</a:t>
             </a:r>
           </a:p>
           <a:p>
@@ -4849,7 +4849,7 @@
           </a:p>
           <a:p>
             <a:r>
-              <a:t>₹4,21,848</a:t>
+              <a:t>₹4,78,800</a:t>
             </a:r>
           </a:p>
           <a:p>
@@ -4864,7 +4864,7 @@
           </a:p>
           <a:p>
             <a:r>
-              <a:t>₹3,28,048</a:t>
+              <a:t>₹3,85,000</a:t>
             </a:r>
           </a:p>
           <a:p>
@@ -4894,12 +4894,12 @@
           </a:p>
           <a:p>
             <a:r>
-              <a:t>₹3,04,048 over three years</a:t>
-            </a:r>
-          </a:p>
-          <a:p>
-            <a:r>
-              <a:t>— roughly nine times what the build costs.</a:t>
+              <a:t>₹3,61,000 over three years</a:t>
+            </a:r>
+          </a:p>
+          <a:p>
+            <a:r>
+              <a:t>— more than ten times what the build costs.</a:t>
             </a:r>
           </a:p>
           <a:p>
@@ -5944,7 +5944,47 @@
           </a:p>
           <a:p>
             <a:r>
-              <a:t>Two ways to buy it</a:t>
+              <a:t>Pay once, or pay every month</a:t>
+            </a:r>
+          </a:p>
+          <a:p>
+            <a:r>
+              <a:t>₹35,000</a:t>
+            </a:r>
+          </a:p>
+          <a:p>
+            <a:r>
+              <a:t>once, then nothing</a:t>
+            </a:r>
+          </a:p>
+          <a:p>
+            <a:r>
+              <a:t>PulseCommerce + your own private WhatsApp gateway</a:t>
+            </a:r>
+          </a:p>
+          <a:p>
+            <a:r>
+              <a:t>All thirteen modules</a:t>
+            </a:r>
+          </a:p>
+          <a:p>
+            <a:r>
+              <a:t>No cost per message, ever</a:t>
+            </a:r>
+          </a:p>
+          <a:p>
+            <a:r>
+              <a:t>No template approval — write and send</a:t>
+            </a:r>
+          </a:p>
+          <a:p>
+            <a:r>
+              <a:t>≈ ₹500/month server, billed by your host</a:t>
+            </a:r>
+          </a:p>
+          <a:p>
+            <a:r>
+              <a:t>Delivery not guaranteed; dedicated number needed</a:t>
             </a:r>
           </a:p>
           <a:p>
@@ -5954,22 +5994,32 @@
           </a:p>
           <a:p>
             <a:r>
-              <a:t>PulseCommerce + WhatsApp Cloud API</a:t>
-            </a:r>
-          </a:p>
-          <a:p>
-            <a:r>
-              <a:t>All thirteen modules</a:t>
-            </a:r>
-          </a:p>
-          <a:p>
-            <a:r>
-              <a:t>Meta's official API — guaranteed delivery</a:t>
-            </a:r>
-          </a:p>
-          <a:p>
-            <a:r>
-              <a:t>Tappable buttons available</a:t>
+              <a:t>once, then ≈ ₹10,000 every month</a:t>
+            </a:r>
+          </a:p>
+          <a:p>
+            <a:r>
+              <a:t>*</a:t>
+            </a:r>
+          </a:p>
+          <a:p>
+            <a:r>
+              <a:t>PulseCommerce + Meta's official WhatsApp Cloud API</a:t>
+            </a:r>
+          </a:p>
+          <a:p>
+            <a:r>
+              <a:t>Meta charges per conversation, forever</a:t>
+            </a:r>
+          </a:p>
+          <a:p>
+            <a:r>
+              <a:t>Templates need Meta's approval</a:t>
+            </a:r>
+          </a:p>
+          <a:p>
+            <a:r>
+              <a:t>Guaranteed delivery, tappable buttons</a:t>
             </a:r>
           </a:p>
           <a:p>
@@ -5979,67 +6029,32 @@
           </a:p>
           <a:p>
             <a:r>
-              <a:t>You pay Meta per conversation</a:t>
-            </a:r>
-          </a:p>
-          <a:p>
-            <a:r>
-              <a:t>Templates need Meta approval</a:t>
-            </a:r>
-          </a:p>
-          <a:p>
-            <a:r>
-              <a:t>₹35,000</a:t>
-            </a:r>
-          </a:p>
-          <a:p>
-            <a:r>
-              <a:t>PulseCommerce + private WhatsApp gateway</a:t>
-            </a:r>
-          </a:p>
-          <a:p>
-            <a:r>
-              <a:t>Dedicated messaging server, yours</a:t>
-            </a:r>
-          </a:p>
-          <a:p>
-            <a:r>
-              <a:t>No per-message fee, ever</a:t>
-            </a:r>
-          </a:p>
-          <a:p>
-            <a:r>
-              <a:t>No template approval, send immediately</a:t>
-            </a:r>
-          </a:p>
-          <a:p>
-            <a:r>
-              <a:t>≈ ₹500/month server, billed by your host</a:t>
-            </a:r>
-          </a:p>
-          <a:p>
-            <a:r>
-              <a:t>Delivery not guaranteed; dedicated number required</a:t>
-            </a:r>
-          </a:p>
-          <a:p>
-            <a:r>
-              <a:t>Both are one-time. Both include deployment, configuration, documentation,</a:t>
-            </a:r>
-          </a:p>
-          <a:p>
-            <a:r>
-              <a:t>handover and the source code in a repository you own. Over three years at</a:t>
-            </a:r>
-          </a:p>
-          <a:p>
-            <a:r>
-              <a:t>twelve campaigns a year, the private gateway costs ₹53,000 against</a:t>
-            </a:r>
-          </a:p>
-          <a:p>
-            <a:r>
-              <a:t>₹3,57,048 for the cheapest subscription platform.</a:t>
+              <a:t>Over three years that is</a:t>
+            </a:r>
+          </a:p>
+          <a:p>
+            <a:r>
+              <a:t>₹53,000</a:t>
+            </a:r>
+          </a:p>
+          <a:p>
+            <a:r>
+              <a:t>against</a:t>
+            </a:r>
+          </a:p>
+          <a:p>
+            <a:r>
+              <a:t>₹3,85,000</a:t>
+            </a:r>
+          </a:p>
+          <a:p>
+            <a:r>
+              <a:t>difference is not the build — it is the per-message fee, which never stops.</a:t>
+            </a:r>
+          </a:p>
+          <a:p>
+            <a:r>
+              <a:t>* One campaign a month to your 11,224 customers, at roughly ₹0.89 per marketing conversation. Meta sets these rates and changes them without notice.</a:t>
             </a:r>
           </a:p>
           <a:p>
@@ -7709,7 +7724,7 @@
           </a:p>
           <a:p>
             <a:r>
-              <a:t>₹74,213</a:t>
+              <a:t>₹74,214</a:t>
             </a:r>
           </a:p>
           <a:p>
@@ -7724,7 +7739,7 @@
           </a:p>
           <a:p>
             <a:r>
-              <a:t>₹1,85,768</a:t>
+              <a:t>₹1,85,752</a:t>
             </a:r>
           </a:p>
           <a:p>
@@ -7739,7 +7754,7 @@
           </a:p>
           <a:p>
             <a:r>
-              <a:t>₹3,71,537</a:t>
+              <a:t>₹3,71,070</a:t>
             </a:r>
           </a:p>
           <a:p>
@@ -7749,12 +7764,7 @@
           </a:p>
           <a:p>
             <a:r>
-              <a:t>already bought from you once — a single win-back campaign returns more than</a:t>
-            </a:r>
-          </a:p>
-          <a:p>
-            <a:r>
-              <a:t>three times the cost of building this platform.</a:t>
+              <a:t>already bought from you once — a single win-back campaign returns roughly twice the cost of the Cloud API build.</a:t>
             </a:r>
           </a:p>
           <a:p>

--- a/proposal/PulseCommerce-Presentation-NaturesJoy.pptx
+++ b/proposal/PulseCommerce-Presentation-NaturesJoy.pptx
@@ -6050,6 +6050,26 @@
           <a:p>
             <a:r>
               <a:t>difference is not the build — it is the per-message fee, which never stops.</a:t>
+            </a:r>
+          </a:p>
+          <a:p>
+            <a:r>
+              <a:t>Both cover the thirteen modules and nothing beyond</a:t>
+            </a:r>
+          </a:p>
+          <a:p>
+            <a:r>
+              <a:t>them. Additional modules, custom metrics, integrations, automation, support or</a:t>
+            </a:r>
+          </a:p>
+          <a:p>
+            <a:r>
+              <a:t>managed hosting are quoted separately and never started without a written</a:t>
+            </a:r>
+          </a:p>
+          <a:p>
+            <a:r>
+              <a:t>quotation you have accepted.</a:t>
             </a:r>
           </a:p>
           <a:p>
